--- a/docs/architecture/Architecture.pptx
+++ b/docs/architecture/Architecture.pptx
@@ -13,9 +13,12 @@
     <p:sldId id="261" r:id="rId7"/>
     <p:sldId id="262" r:id="rId8"/>
     <p:sldId id="263" r:id="rId9"/>
-    <p:sldId id="264" r:id="rId10"/>
-    <p:sldId id="265" r:id="rId11"/>
-    <p:sldId id="266" r:id="rId12"/>
+    <p:sldId id="267" r:id="rId10"/>
+    <p:sldId id="264" r:id="rId11"/>
+    <p:sldId id="265" r:id="rId12"/>
+    <p:sldId id="268" r:id="rId13"/>
+    <p:sldId id="266" r:id="rId14"/>
+    <p:sldId id="269" r:id="rId15"/>
   </p:sldIdLst>
   <p:sldSz cx="12192000" cy="6858000"/>
   <p:notesSz cx="6858000" cy="9144000"/>
@@ -312,7 +315,7 @@
           <a:p>
             <a:fld id="{5BCAD085-E8A6-8845-BD4E-CB4CCA059FC4}" type="datetimeFigureOut">
               <a:rPr lang="en-US" smtClean="0"/>
-              <a:t>7/16/2026</a:t>
+              <a:t>7/22/2026</a:t>
             </a:fld>
             <a:endParaRPr lang="en-US"/>
           </a:p>
@@ -480,7 +483,7 @@
           <a:p>
             <a:fld id="{5BCAD085-E8A6-8845-BD4E-CB4CCA059FC4}" type="datetimeFigureOut">
               <a:rPr lang="en-US" smtClean="0"/>
-              <a:t>7/16/2026</a:t>
+              <a:t>7/22/2026</a:t>
             </a:fld>
             <a:endParaRPr lang="en-US"/>
           </a:p>
@@ -658,7 +661,7 @@
           <a:p>
             <a:fld id="{5BCAD085-E8A6-8845-BD4E-CB4CCA059FC4}" type="datetimeFigureOut">
               <a:rPr lang="en-US" smtClean="0"/>
-              <a:t>7/16/2026</a:t>
+              <a:t>7/22/2026</a:t>
             </a:fld>
             <a:endParaRPr lang="en-US"/>
           </a:p>
@@ -826,7 +829,7 @@
           <a:p>
             <a:fld id="{5BCAD085-E8A6-8845-BD4E-CB4CCA059FC4}" type="datetimeFigureOut">
               <a:rPr lang="en-US" smtClean="0"/>
-              <a:t>7/16/2026</a:t>
+              <a:t>7/22/2026</a:t>
             </a:fld>
             <a:endParaRPr lang="en-US"/>
           </a:p>
@@ -1071,7 +1074,7 @@
           <a:p>
             <a:fld id="{5BCAD085-E8A6-8845-BD4E-CB4CCA059FC4}" type="datetimeFigureOut">
               <a:rPr lang="en-US" smtClean="0"/>
-              <a:t>7/16/2026</a:t>
+              <a:t>7/22/2026</a:t>
             </a:fld>
             <a:endParaRPr lang="en-US"/>
           </a:p>
@@ -1356,7 +1359,7 @@
           <a:p>
             <a:fld id="{5BCAD085-E8A6-8845-BD4E-CB4CCA059FC4}" type="datetimeFigureOut">
               <a:rPr lang="en-US" smtClean="0"/>
-              <a:t>7/16/2026</a:t>
+              <a:t>7/22/2026</a:t>
             </a:fld>
             <a:endParaRPr lang="en-US"/>
           </a:p>
@@ -1775,7 +1778,7 @@
           <a:p>
             <a:fld id="{5BCAD085-E8A6-8845-BD4E-CB4CCA059FC4}" type="datetimeFigureOut">
               <a:rPr lang="en-US" smtClean="0"/>
-              <a:t>7/16/2026</a:t>
+              <a:t>7/22/2026</a:t>
             </a:fld>
             <a:endParaRPr lang="en-US"/>
           </a:p>
@@ -1892,7 +1895,7 @@
           <a:p>
             <a:fld id="{5BCAD085-E8A6-8845-BD4E-CB4CCA059FC4}" type="datetimeFigureOut">
               <a:rPr lang="en-US" smtClean="0"/>
-              <a:t>7/16/2026</a:t>
+              <a:t>7/22/2026</a:t>
             </a:fld>
             <a:endParaRPr lang="en-US"/>
           </a:p>
@@ -1987,7 +1990,7 @@
           <a:p>
             <a:fld id="{5BCAD085-E8A6-8845-BD4E-CB4CCA059FC4}" type="datetimeFigureOut">
               <a:rPr lang="en-US" smtClean="0"/>
-              <a:t>7/16/2026</a:t>
+              <a:t>7/22/2026</a:t>
             </a:fld>
             <a:endParaRPr lang="en-US"/>
           </a:p>
@@ -2262,7 +2265,7 @@
           <a:p>
             <a:fld id="{5BCAD085-E8A6-8845-BD4E-CB4CCA059FC4}" type="datetimeFigureOut">
               <a:rPr lang="en-US" smtClean="0"/>
-              <a:t>7/16/2026</a:t>
+              <a:t>7/22/2026</a:t>
             </a:fld>
             <a:endParaRPr lang="en-US"/>
           </a:p>
@@ -2514,7 +2517,7 @@
           <a:p>
             <a:fld id="{5BCAD085-E8A6-8845-BD4E-CB4CCA059FC4}" type="datetimeFigureOut">
               <a:rPr lang="en-US" smtClean="0"/>
-              <a:t>7/16/2026</a:t>
+              <a:t>7/22/2026</a:t>
             </a:fld>
             <a:endParaRPr lang="en-US"/>
           </a:p>
@@ -2725,7 +2728,7 @@
           <a:p>
             <a:fld id="{5BCAD085-E8A6-8845-BD4E-CB4CCA059FC4}" type="datetimeFigureOut">
               <a:rPr lang="en-US" smtClean="0"/>
-              <a:t>7/16/2026</a:t>
+              <a:t>7/22/2026</a:t>
             </a:fld>
             <a:endParaRPr lang="en-US"/>
           </a:p>
@@ -3912,7 +3915,7 @@
               </a:defRPr>
             </a:pPr>
             <a:r>
-              <a:t>Стадия 0: пакет → CVAT → БД</a:t>
+              <a:t>Datapipe: keypoints коров</a:t>
             </a:r>
           </a:p>
         </p:txBody>
@@ -3947,7 +3950,7 @@
               </a:defRPr>
             </a:pPr>
             <a:r>
-              <a:t>что происходит с каждым completed-пакетом</a:t>
+              <a:t>пакеты → CVAT → обучение → prod</a:t>
             </a:r>
           </a:p>
         </p:txBody>
@@ -3960,8 +3963,62 @@
         </p:nvSpPr>
         <p:spPr>
           <a:xfrm>
-            <a:off x="365760" y="1280160"/>
-            <a:ext cx="2148840" cy="2377440"/>
+            <a:off x="411480" y="1051560"/>
+            <a:ext cx="11338560" cy="777240"/>
+          </a:xfrm>
+          <a:prstGeom prst="roundRect">
+            <a:avLst/>
+          </a:prstGeom>
+          <a:solidFill>
+            <a:srgbClr val="1E2A3D"/>
+          </a:solidFill>
+          <a:ln w="19050">
+            <a:solidFill>
+              <a:srgbClr val="2DD4BF"/>
+            </a:solidFill>
+          </a:ln>
+        </p:spPr>
+        <p:style>
+          <a:lnRef idx="1">
+            <a:schemeClr val="accent1"/>
+          </a:lnRef>
+          <a:fillRef idx="3">
+            <a:schemeClr val="accent1"/>
+          </a:fillRef>
+          <a:effectRef idx="2">
+            <a:schemeClr val="accent1"/>
+          </a:effectRef>
+          <a:fontRef idx="minor">
+            <a:schemeClr val="lt1"/>
+          </a:fontRef>
+        </p:style>
+        <p:txBody>
+          <a:bodyPr wrap="square" lIns="101600" tIns="50800" rIns="101600" bIns="50800" rtlCol="0" anchor="ctr"/>
+          <a:lstStyle/>
+          <a:p>
+            <a:pPr algn="ctr">
+              <a:defRPr sz="1400" b="1">
+                <a:solidFill>
+                  <a:srgbClr val="E8EAED"/>
+                </a:solidFill>
+              </a:defRPr>
+            </a:pPr>
+            <a:r>
+              <a:t>Два входа:  новые пакеты из БД проекта  ·  разметка из всех проектов CVAT</a:t>
+            </a:r>
+          </a:p>
+        </p:txBody>
+      </p:sp>
+      <p:sp>
+        <p:nvSpPr>
+          <p:cNvPr id="5" name="Rounded Rectangle 4"/>
+          <p:cNvSpPr/>
+          <p:nvPr/>
+        </p:nvSpPr>
+        <p:spPr>
+          <a:xfrm>
+            <a:off x="365760" y="2057400"/>
+            <a:ext cx="2194560" cy="2651760"/>
           </a:xfrm>
           <a:prstGeom prst="roundRect">
             <a:avLst/>
@@ -4001,11 +4058,7 @@
               </a:defRPr>
             </a:pPr>
             <a:r>
-              <a:t>1</a:t>
-            </a:r>
-            <a:br/>
-            <a:r>
-              <a:t>Читаем пакеты</a:t>
+              <a:t>0  Пакеты</a:t>
             </a:r>
           </a:p>
           <a:p>
@@ -4020,25 +4073,29 @@
               </a:defRPr>
             </a:pPr>
             <a:r>
-              <a:t>package_session</a:t>
+              <a:t>из БД проекта:</a:t>
             </a:r>
             <a:br/>
             <a:r>
-              <a:t>uploaded_blob</a:t>
+              <a:t>фото → Gradio →</a:t>
+            </a:r>
+            <a:br/>
+            <a:r>
+              <a:t>CVAT → обратно в БД</a:t>
             </a:r>
           </a:p>
         </p:txBody>
       </p:sp>
       <p:cxnSp>
         <p:nvCxnSpPr>
-          <p:cNvPr id="5" name="Connector 4"/>
+          <p:cNvPr id="6" name="Connector 5"/>
           <p:cNvCxnSpPr/>
           <p:nvPr/>
         </p:nvCxnSpPr>
         <p:spPr>
           <a:xfrm>
-            <a:off x="2514600" y="2468880"/>
-            <a:ext cx="182880" cy="0"/>
+            <a:off x="2560320" y="3383280"/>
+            <a:ext cx="137160" cy="0"/>
           </a:xfrm>
           <a:prstGeom prst="line">
             <a:avLst/>
@@ -4066,14 +4123,14 @@
       </p:cxnSp>
       <p:sp>
         <p:nvSpPr>
-          <p:cNvPr id="6" name="Rounded Rectangle 5"/>
+          <p:cNvPr id="7" name="Rounded Rectangle 6"/>
           <p:cNvSpPr/>
           <p:nvPr/>
         </p:nvSpPr>
         <p:spPr>
           <a:xfrm>
-            <a:off x="2697480" y="1280160"/>
-            <a:ext cx="2148840" cy="2377440"/>
+            <a:off x="2697480" y="2057400"/>
+            <a:ext cx="2194560" cy="2651760"/>
           </a:xfrm>
           <a:prstGeom prst="roundRect">
             <a:avLst/>
@@ -4083,7 +4140,7 @@
           </a:solidFill>
           <a:ln w="19050">
             <a:solidFill>
-              <a:srgbClr val="2DD4BF"/>
+              <a:srgbClr val="3DCC85"/>
             </a:solidFill>
           </a:ln>
         </p:spPr>
@@ -4113,11 +4170,7 @@
               </a:defRPr>
             </a:pPr>
             <a:r>
-              <a:t>2</a:t>
-            </a:r>
-            <a:br/>
-            <a:r>
-              <a:t>Качаем фото</a:t>
+              <a:t>1  Аннотация</a:t>
             </a:r>
           </a:p>
           <a:p>
@@ -4132,32 +4185,36 @@
               </a:defRPr>
             </a:pPr>
             <a:r>
-              <a:t>из S3</a:t>
+              <a:t>все проекты CVAT:</a:t>
             </a:r>
             <a:br/>
             <a:r>
-              <a:t>upload-packages</a:t>
+              <a:t>разметка → bbox →</a:t>
+            </a:r>
+            <a:br/>
+            <a:r>
+              <a:t>dataset train/val/test</a:t>
             </a:r>
           </a:p>
         </p:txBody>
       </p:sp>
       <p:cxnSp>
         <p:nvCxnSpPr>
-          <p:cNvPr id="7" name="Connector 6"/>
+          <p:cNvPr id="8" name="Connector 7"/>
           <p:cNvCxnSpPr/>
           <p:nvPr/>
         </p:nvCxnSpPr>
         <p:spPr>
           <a:xfrm>
-            <a:off x="4846320" y="2468880"/>
-            <a:ext cx="182880" cy="0"/>
+            <a:off x="4892040" y="3383280"/>
+            <a:ext cx="137160" cy="0"/>
           </a:xfrm>
           <a:prstGeom prst="line">
             <a:avLst/>
           </a:prstGeom>
           <a:ln w="25400">
             <a:solidFill>
-              <a:srgbClr val="2DD4BF"/>
+              <a:srgbClr val="3DCC85"/>
             </a:solidFill>
           </a:ln>
         </p:spPr>
@@ -4178,14 +4235,14 @@
       </p:cxnSp>
       <p:sp>
         <p:nvSpPr>
-          <p:cNvPr id="8" name="Rounded Rectangle 7"/>
+          <p:cNvPr id="9" name="Rounded Rectangle 8"/>
           <p:cNvSpPr/>
           <p:nvPr/>
         </p:nvSpPr>
         <p:spPr>
           <a:xfrm>
-            <a:off x="5029200" y="1280160"/>
-            <a:ext cx="2148840" cy="2377440"/>
+            <a:off x="5029200" y="2057400"/>
+            <a:ext cx="2194560" cy="2651760"/>
           </a:xfrm>
           <a:prstGeom prst="roundRect">
             <a:avLst/>
@@ -4225,11 +4282,7 @@
               </a:defRPr>
             </a:pPr>
             <a:r>
-              <a:t>3</a:t>
-            </a:r>
-            <a:br/>
-            <a:r>
-              <a:t>Инференс</a:t>
+              <a:t>2  Обучение</a:t>
             </a:r>
           </a:p>
           <a:p>
@@ -4244,25 +4297,29 @@
               </a:defRPr>
             </a:pPr>
             <a:r>
-              <a:t>Gradio →</a:t>
+              <a:t>заморозка датасета</a:t>
             </a:r>
             <a:br/>
             <a:r>
-              <a:t>cow_inference_result</a:t>
+              <a:t>train keypoints</a:t>
+            </a:r>
+            <a:br/>
+            <a:r>
+              <a:t>выбор лучшей</a:t>
             </a:r>
           </a:p>
         </p:txBody>
       </p:sp>
       <p:cxnSp>
         <p:nvCxnSpPr>
-          <p:cNvPr id="9" name="Connector 8"/>
+          <p:cNvPr id="10" name="Connector 9"/>
           <p:cNvCxnSpPr/>
           <p:nvPr/>
         </p:nvCxnSpPr>
         <p:spPr>
           <a:xfrm>
-            <a:off x="7178040" y="2468880"/>
-            <a:ext cx="182880" cy="0"/>
+            <a:off x="7223760" y="3383280"/>
+            <a:ext cx="137160" cy="0"/>
           </a:xfrm>
           <a:prstGeom prst="line">
             <a:avLst/>
@@ -4290,14 +4347,14 @@
       </p:cxnSp>
       <p:sp>
         <p:nvSpPr>
-          <p:cNvPr id="10" name="Rounded Rectangle 9"/>
+          <p:cNvPr id="11" name="Rounded Rectangle 10"/>
           <p:cNvSpPr/>
           <p:nvPr/>
         </p:nvSpPr>
         <p:spPr>
           <a:xfrm>
-            <a:off x="7360920" y="1280160"/>
-            <a:ext cx="2148840" cy="2377440"/>
+            <a:off x="7360920" y="2057400"/>
+            <a:ext cx="2194560" cy="2651760"/>
           </a:xfrm>
           <a:prstGeom prst="roundRect">
             <a:avLst/>
@@ -4307,7 +4364,7 @@
           </a:solidFill>
           <a:ln w="19050">
             <a:solidFill>
-              <a:srgbClr val="3DCC85"/>
+              <a:srgbClr val="9B7ED0"/>
             </a:solidFill>
           </a:ln>
         </p:spPr>
@@ -4337,11 +4394,7 @@
               </a:defRPr>
             </a:pPr>
             <a:r>
-              <a:t>4</a:t>
-            </a:r>
-            <a:br/>
-            <a:r>
-              <a:t>CVAT</a:t>
+              <a:t>3  FiftyOne</a:t>
             </a:r>
           </a:p>
           <a:p>
@@ -4356,32 +4409,32 @@
               </a:defRPr>
             </a:pPr>
             <a:r>
-              <a:t>создаём задачу</a:t>
+              <a:t>публикация GT</a:t>
             </a:r>
             <a:br/>
             <a:r>
-              <a:t>разметки</a:t>
+              <a:t>и предсказаний</a:t>
             </a:r>
           </a:p>
         </p:txBody>
       </p:sp>
       <p:cxnSp>
         <p:nvCxnSpPr>
-          <p:cNvPr id="11" name="Connector 10"/>
+          <p:cNvPr id="12" name="Connector 11"/>
           <p:cNvCxnSpPr/>
           <p:nvPr/>
         </p:nvCxnSpPr>
         <p:spPr>
           <a:xfrm>
-            <a:off x="9509760" y="2468880"/>
-            <a:ext cx="182880" cy="0"/>
+            <a:off x="9555480" y="3383280"/>
+            <a:ext cx="137160" cy="0"/>
           </a:xfrm>
           <a:prstGeom prst="line">
             <a:avLst/>
           </a:prstGeom>
           <a:ln w="25400">
             <a:solidFill>
-              <a:srgbClr val="3DCC85"/>
+              <a:srgbClr val="9B7ED0"/>
             </a:solidFill>
           </a:ln>
         </p:spPr>
@@ -4402,14 +4455,14 @@
       </p:cxnSp>
       <p:sp>
         <p:nvSpPr>
-          <p:cNvPr id="12" name="Rounded Rectangle 11"/>
+          <p:cNvPr id="13" name="Rounded Rectangle 12"/>
           <p:cNvSpPr/>
           <p:nvPr/>
         </p:nvSpPr>
         <p:spPr>
           <a:xfrm>
-            <a:off x="9692640" y="1280160"/>
-            <a:ext cx="2148840" cy="2377440"/>
+            <a:off x="9692640" y="2057400"/>
+            <a:ext cx="2194560" cy="2651760"/>
           </a:xfrm>
           <a:prstGeom prst="roundRect">
             <a:avLst/>
@@ -4449,11 +4502,7 @@
               </a:defRPr>
             </a:pPr>
             <a:r>
-              <a:t>5</a:t>
-            </a:r>
-            <a:br/>
-            <a:r>
-              <a:t>Пишем назад</a:t>
+              <a:t>4  Prod</a:t>
             </a:r>
           </a:p>
           <a:p>
@@ -4468,25 +4517,29 @@
               </a:defRPr>
             </a:pPr>
             <a:r>
-              <a:t>cvat_link +</a:t>
+              <a:t>боевая модель</a:t>
             </a:r>
             <a:br/>
             <a:r>
-              <a:t>keypoints GT</a:t>
-            </a:r>
-          </a:p>
-        </p:txBody>
-      </p:sp>
-      <p:sp>
-        <p:nvSpPr>
-          <p:cNvPr id="13" name="Rounded Rectangle 12"/>
+              <a:t>инференс → БД</a:t>
+            </a:r>
+            <a:br/>
+            <a:r>
+              <a:t>слой в админке</a:t>
+            </a:r>
+          </a:p>
+        </p:txBody>
+      </p:sp>
+      <p:sp>
+        <p:nvSpPr>
+          <p:cNvPr id="14" name="Rounded Rectangle 13"/>
           <p:cNvSpPr/>
           <p:nvPr/>
         </p:nvSpPr>
         <p:spPr>
           <a:xfrm>
-            <a:off x="411480" y="3931920"/>
-            <a:ext cx="5577840" cy="2011680"/>
+            <a:off x="411480" y="4983480"/>
+            <a:ext cx="5577840" cy="1143000"/>
           </a:xfrm>
           <a:prstGeom prst="roundRect">
             <a:avLst/>
@@ -4496,7 +4549,7 @@
           </a:solidFill>
           <a:ln w="19050">
             <a:solidFill>
-              <a:srgbClr val="2DD4BF"/>
+              <a:srgbClr val="5B8DEF"/>
             </a:solidFill>
           </a:ln>
         </p:spPr>
@@ -4518,52 +4571,44 @@
           <a:bodyPr wrap="square" lIns="101600" tIns="50800" rIns="101600" bIns="50800" rtlCol="0" anchor="ctr"/>
           <a:lstStyle/>
           <a:p>
-            <a:pPr algn="l">
-              <a:defRPr sz="1500" b="1">
+            <a:pPr algn="ctr">
+              <a:defRPr sz="1400" b="1">
                 <a:solidFill>
                   <a:srgbClr val="E8EAED"/>
                 </a:solidFill>
               </a:defRPr>
             </a:pPr>
             <a:r>
-              <a:t>Триггер</a:t>
-            </a:r>
-          </a:p>
-          <a:p>
-            <a:pPr algn="l">
+              <a:t>На каждый пакет</a:t>
+            </a:r>
+          </a:p>
+          <a:p>
+            <a:pPr algn="ctr">
               <a:spcBef>
                 <a:spcPts val="300"/>
               </a:spcBef>
-              <a:defRPr sz="1300">
+              <a:defRPr sz="1200">
                 <a:solidFill>
                   <a:srgbClr val="9CA3AF"/>
                 </a:solidFill>
               </a:defRPr>
             </a:pPr>
             <a:r>
-              <a:t>commit пакета на сервере</a:t>
-            </a:r>
-            <a:br/>
-            <a:r>
-              <a:t>или webhook CVAT → Datapipe API</a:t>
-            </a:r>
-            <a:br/>
-            <a:r>
-              <a:t>(job в acceptance / completed)</a:t>
-            </a:r>
-          </a:p>
-        </p:txBody>
-      </p:sp>
-      <p:sp>
-        <p:nvSpPr>
-          <p:cNvPr id="14" name="Rounded Rectangle 13"/>
+              <a:t>стадия 0 · после commit / webhook CVAT</a:t>
+            </a:r>
+          </a:p>
+        </p:txBody>
+      </p:sp>
+      <p:sp>
+        <p:nvSpPr>
+          <p:cNvPr id="15" name="Rounded Rectangle 14"/>
           <p:cNvSpPr/>
           <p:nvPr/>
         </p:nvSpPr>
         <p:spPr>
           <a:xfrm>
-            <a:off x="6172200" y="3931920"/>
-            <a:ext cx="5577840" cy="2011680"/>
+            <a:off x="6172200" y="4983480"/>
+            <a:ext cx="5577840" cy="1143000"/>
           </a:xfrm>
           <a:prstGeom prst="roundRect">
             <a:avLst/>
@@ -4573,7 +4618,7 @@
           </a:solidFill>
           <a:ln w="19050">
             <a:solidFill>
-              <a:srgbClr val="3DCC85"/>
+              <a:srgbClr val="E87A7E"/>
             </a:solidFill>
           </a:ln>
         </p:spPr>
@@ -4595,45 +4640,37 @@
           <a:bodyPr wrap="square" lIns="101600" tIns="50800" rIns="101600" bIns="50800" rtlCol="0" anchor="ctr"/>
           <a:lstStyle/>
           <a:p>
-            <a:pPr algn="l">
-              <a:defRPr sz="1500" b="1">
+            <a:pPr algn="ctr">
+              <a:defRPr sz="1400" b="1">
                 <a:solidFill>
                   <a:srgbClr val="E8EAED"/>
                 </a:solidFill>
               </a:defRPr>
             </a:pPr>
             <a:r>
-              <a:t>В админке видно</a:t>
-            </a:r>
-          </a:p>
-          <a:p>
-            <a:pPr algn="l">
+              <a:t>Цикл модели</a:t>
+            </a:r>
+          </a:p>
+          <a:p>
+            <a:pPr algn="ctr">
               <a:spcBef>
                 <a:spcPts val="300"/>
               </a:spcBef>
-              <a:defRPr sz="1300">
+              <a:defRPr sz="1200">
                 <a:solidFill>
                   <a:srgbClr val="9CA3AF"/>
                 </a:solidFill>
               </a:defRPr>
             </a:pPr>
             <a:r>
-              <a:t>слой инференса</a:t>
-            </a:r>
-            <a:br/>
-            <a:r>
-              <a:t>ссылка на CVAT</a:t>
-            </a:r>
-            <a:br/>
-            <a:r>
-              <a:t>keypoints после разметки</a:t>
-            </a:r>
-          </a:p>
-        </p:txBody>
-      </p:sp>
-      <p:sp>
-        <p:nvSpPr>
-          <p:cNvPr id="15" name="TextBox 14"/>
+              <a:t>стадии 1 → 2 → 3 → 4 · ML-инженер</a:t>
+            </a:r>
+          </a:p>
+        </p:txBody>
+      </p:sp>
+      <p:sp>
+        <p:nvSpPr>
+          <p:cNvPr id="16" name="TextBox 15"/>
           <p:cNvSpPr txBox="1"/>
           <p:nvPr/>
         </p:nvSpPr>
@@ -4668,7 +4705,7 @@
       </p:sp>
       <p:sp>
         <p:nvSpPr>
-          <p:cNvPr id="16" name="TextBox 15"/>
+          <p:cNvPr id="17" name="TextBox 16"/>
           <p:cNvSpPr txBox="1"/>
           <p:nvPr/>
         </p:nvSpPr>
@@ -4696,7 +4733,7 @@
               </a:defRPr>
             </a:pPr>
             <a:r>
-              <a:t>10/11</a:t>
+              <a:t>09/11</a:t>
             </a:r>
           </a:p>
         </p:txBody>
@@ -4764,6 +4801,1089 @@
               </a:defRPr>
             </a:pPr>
             <a:r>
+              <a:t>Стадия 0: пакет → CVAT → БД</a:t>
+            </a:r>
+          </a:p>
+        </p:txBody>
+      </p:sp>
+      <p:sp>
+        <p:nvSpPr>
+          <p:cNvPr id="3" name="TextBox 2"/>
+          <p:cNvSpPr txBox="1"/>
+          <p:nvPr/>
+        </p:nvSpPr>
+        <p:spPr>
+          <a:xfrm>
+            <a:off x="502920" y="658368"/>
+            <a:ext cx="11155680" cy="256032"/>
+          </a:xfrm>
+          <a:prstGeom prst="rect">
+            <a:avLst/>
+          </a:prstGeom>
+          <a:noFill/>
+        </p:spPr>
+        <p:txBody>
+          <a:bodyPr wrap="square" anchor="t">
+            <a:spAutoFit/>
+          </a:bodyPr>
+          <a:lstStyle/>
+          <a:p>
+            <a:pPr algn="l">
+              <a:defRPr sz="1100" b="0">
+                <a:solidFill>
+                  <a:srgbClr val="9CA3AF"/>
+                </a:solidFill>
+              </a:defRPr>
+            </a:pPr>
+            <a:r>
+              <a:t>что происходит с каждым completed-пакетом</a:t>
+            </a:r>
+          </a:p>
+        </p:txBody>
+      </p:sp>
+      <p:sp>
+        <p:nvSpPr>
+          <p:cNvPr id="4" name="Rounded Rectangle 3"/>
+          <p:cNvSpPr/>
+          <p:nvPr/>
+        </p:nvSpPr>
+        <p:spPr>
+          <a:xfrm>
+            <a:off x="365760" y="1280160"/>
+            <a:ext cx="2148840" cy="2377440"/>
+          </a:xfrm>
+          <a:prstGeom prst="roundRect">
+            <a:avLst/>
+          </a:prstGeom>
+          <a:solidFill>
+            <a:srgbClr val="1E2A3D"/>
+          </a:solidFill>
+          <a:ln w="19050">
+            <a:solidFill>
+              <a:srgbClr val="5B8DEF"/>
+            </a:solidFill>
+          </a:ln>
+        </p:spPr>
+        <p:style>
+          <a:lnRef idx="1">
+            <a:schemeClr val="accent1"/>
+          </a:lnRef>
+          <a:fillRef idx="3">
+            <a:schemeClr val="accent1"/>
+          </a:fillRef>
+          <a:effectRef idx="2">
+            <a:schemeClr val="accent1"/>
+          </a:effectRef>
+          <a:fontRef idx="minor">
+            <a:schemeClr val="lt1"/>
+          </a:fontRef>
+        </p:style>
+        <p:txBody>
+          <a:bodyPr wrap="square" lIns="101600" tIns="50800" rIns="101600" bIns="50800" rtlCol="0" anchor="ctr"/>
+          <a:lstStyle/>
+          <a:p>
+            <a:pPr algn="ctr">
+              <a:defRPr sz="1400" b="1">
+                <a:solidFill>
+                  <a:srgbClr val="E8EAED"/>
+                </a:solidFill>
+              </a:defRPr>
+            </a:pPr>
+            <a:r>
+              <a:t>1</a:t>
+            </a:r>
+            <a:br/>
+            <a:r>
+              <a:t>Читаем пакеты</a:t>
+            </a:r>
+          </a:p>
+          <a:p>
+            <a:pPr algn="ctr">
+              <a:spcBef>
+                <a:spcPts val="300"/>
+              </a:spcBef>
+              <a:defRPr sz="1100">
+                <a:solidFill>
+                  <a:srgbClr val="9CA3AF"/>
+                </a:solidFill>
+              </a:defRPr>
+            </a:pPr>
+            <a:r>
+              <a:t>package_session</a:t>
+            </a:r>
+            <a:br/>
+            <a:r>
+              <a:t>uploaded_blob</a:t>
+            </a:r>
+          </a:p>
+        </p:txBody>
+      </p:sp>
+      <p:cxnSp>
+        <p:nvCxnSpPr>
+          <p:cNvPr id="5" name="Connector 4"/>
+          <p:cNvCxnSpPr/>
+          <p:nvPr/>
+        </p:nvCxnSpPr>
+        <p:spPr>
+          <a:xfrm>
+            <a:off x="2514600" y="2468880"/>
+            <a:ext cx="182880" cy="0"/>
+          </a:xfrm>
+          <a:prstGeom prst="line">
+            <a:avLst/>
+          </a:prstGeom>
+          <a:ln w="25400">
+            <a:solidFill>
+              <a:srgbClr val="5B8DEF"/>
+            </a:solidFill>
+          </a:ln>
+        </p:spPr>
+        <p:style>
+          <a:lnRef idx="2">
+            <a:schemeClr val="accent1"/>
+          </a:lnRef>
+          <a:fillRef idx="0">
+            <a:schemeClr val="accent1"/>
+          </a:fillRef>
+          <a:effectRef idx="1">
+            <a:schemeClr val="accent1"/>
+          </a:effectRef>
+          <a:fontRef idx="minor">
+            <a:schemeClr val="tx1"/>
+          </a:fontRef>
+        </p:style>
+      </p:cxnSp>
+      <p:sp>
+        <p:nvSpPr>
+          <p:cNvPr id="6" name="Rounded Rectangle 5"/>
+          <p:cNvSpPr/>
+          <p:nvPr/>
+        </p:nvSpPr>
+        <p:spPr>
+          <a:xfrm>
+            <a:off x="2697480" y="1280160"/>
+            <a:ext cx="2148840" cy="2377440"/>
+          </a:xfrm>
+          <a:prstGeom prst="roundRect">
+            <a:avLst/>
+          </a:prstGeom>
+          <a:solidFill>
+            <a:srgbClr val="1E2A3D"/>
+          </a:solidFill>
+          <a:ln w="19050">
+            <a:solidFill>
+              <a:srgbClr val="2DD4BF"/>
+            </a:solidFill>
+          </a:ln>
+        </p:spPr>
+        <p:style>
+          <a:lnRef idx="1">
+            <a:schemeClr val="accent1"/>
+          </a:lnRef>
+          <a:fillRef idx="3">
+            <a:schemeClr val="accent1"/>
+          </a:fillRef>
+          <a:effectRef idx="2">
+            <a:schemeClr val="accent1"/>
+          </a:effectRef>
+          <a:fontRef idx="minor">
+            <a:schemeClr val="lt1"/>
+          </a:fontRef>
+        </p:style>
+        <p:txBody>
+          <a:bodyPr wrap="square" lIns="101600" tIns="50800" rIns="101600" bIns="50800" rtlCol="0" anchor="ctr"/>
+          <a:lstStyle/>
+          <a:p>
+            <a:pPr algn="ctr">
+              <a:defRPr sz="1400" b="1">
+                <a:solidFill>
+                  <a:srgbClr val="E8EAED"/>
+                </a:solidFill>
+              </a:defRPr>
+            </a:pPr>
+            <a:r>
+              <a:t>2</a:t>
+            </a:r>
+            <a:br/>
+            <a:r>
+              <a:t>Качаем фото</a:t>
+            </a:r>
+          </a:p>
+          <a:p>
+            <a:pPr algn="ctr">
+              <a:spcBef>
+                <a:spcPts val="300"/>
+              </a:spcBef>
+              <a:defRPr sz="1100">
+                <a:solidFill>
+                  <a:srgbClr val="9CA3AF"/>
+                </a:solidFill>
+              </a:defRPr>
+            </a:pPr>
+            <a:r>
+              <a:t>из S3</a:t>
+            </a:r>
+            <a:br/>
+            <a:r>
+              <a:t>upload-packages</a:t>
+            </a:r>
+          </a:p>
+        </p:txBody>
+      </p:sp>
+      <p:cxnSp>
+        <p:nvCxnSpPr>
+          <p:cNvPr id="7" name="Connector 6"/>
+          <p:cNvCxnSpPr/>
+          <p:nvPr/>
+        </p:nvCxnSpPr>
+        <p:spPr>
+          <a:xfrm>
+            <a:off x="4846320" y="2468880"/>
+            <a:ext cx="182880" cy="0"/>
+          </a:xfrm>
+          <a:prstGeom prst="line">
+            <a:avLst/>
+          </a:prstGeom>
+          <a:ln w="25400">
+            <a:solidFill>
+              <a:srgbClr val="2DD4BF"/>
+            </a:solidFill>
+          </a:ln>
+        </p:spPr>
+        <p:style>
+          <a:lnRef idx="2">
+            <a:schemeClr val="accent1"/>
+          </a:lnRef>
+          <a:fillRef idx="0">
+            <a:schemeClr val="accent1"/>
+          </a:fillRef>
+          <a:effectRef idx="1">
+            <a:schemeClr val="accent1"/>
+          </a:effectRef>
+          <a:fontRef idx="minor">
+            <a:schemeClr val="tx1"/>
+          </a:fontRef>
+        </p:style>
+      </p:cxnSp>
+      <p:sp>
+        <p:nvSpPr>
+          <p:cNvPr id="8" name="Rounded Rectangle 7"/>
+          <p:cNvSpPr/>
+          <p:nvPr/>
+        </p:nvSpPr>
+        <p:spPr>
+          <a:xfrm>
+            <a:off x="5029200" y="1280160"/>
+            <a:ext cx="2148840" cy="2377440"/>
+          </a:xfrm>
+          <a:prstGeom prst="roundRect">
+            <a:avLst/>
+          </a:prstGeom>
+          <a:solidFill>
+            <a:srgbClr val="1E2A3D"/>
+          </a:solidFill>
+          <a:ln w="19050">
+            <a:solidFill>
+              <a:srgbClr val="D4A84B"/>
+            </a:solidFill>
+          </a:ln>
+        </p:spPr>
+        <p:style>
+          <a:lnRef idx="1">
+            <a:schemeClr val="accent1"/>
+          </a:lnRef>
+          <a:fillRef idx="3">
+            <a:schemeClr val="accent1"/>
+          </a:fillRef>
+          <a:effectRef idx="2">
+            <a:schemeClr val="accent1"/>
+          </a:effectRef>
+          <a:fontRef idx="minor">
+            <a:schemeClr val="lt1"/>
+          </a:fontRef>
+        </p:style>
+        <p:txBody>
+          <a:bodyPr wrap="square" lIns="101600" tIns="50800" rIns="101600" bIns="50800" rtlCol="0" anchor="ctr"/>
+          <a:lstStyle/>
+          <a:p>
+            <a:pPr algn="ctr">
+              <a:defRPr sz="1400" b="1">
+                <a:solidFill>
+                  <a:srgbClr val="E8EAED"/>
+                </a:solidFill>
+              </a:defRPr>
+            </a:pPr>
+            <a:r>
+              <a:t>3</a:t>
+            </a:r>
+            <a:br/>
+            <a:r>
+              <a:t>Инференс</a:t>
+            </a:r>
+          </a:p>
+          <a:p>
+            <a:pPr algn="ctr">
+              <a:spcBef>
+                <a:spcPts val="300"/>
+              </a:spcBef>
+              <a:defRPr sz="1100">
+                <a:solidFill>
+                  <a:srgbClr val="9CA3AF"/>
+                </a:solidFill>
+              </a:defRPr>
+            </a:pPr>
+            <a:r>
+              <a:t>Gradio →</a:t>
+            </a:r>
+            <a:br/>
+            <a:r>
+              <a:t>cow_inference_result</a:t>
+            </a:r>
+          </a:p>
+        </p:txBody>
+      </p:sp>
+      <p:cxnSp>
+        <p:nvCxnSpPr>
+          <p:cNvPr id="9" name="Connector 8"/>
+          <p:cNvCxnSpPr/>
+          <p:nvPr/>
+        </p:nvCxnSpPr>
+        <p:spPr>
+          <a:xfrm>
+            <a:off x="7178040" y="2468880"/>
+            <a:ext cx="182880" cy="0"/>
+          </a:xfrm>
+          <a:prstGeom prst="line">
+            <a:avLst/>
+          </a:prstGeom>
+          <a:ln w="25400">
+            <a:solidFill>
+              <a:srgbClr val="D4A84B"/>
+            </a:solidFill>
+          </a:ln>
+        </p:spPr>
+        <p:style>
+          <a:lnRef idx="2">
+            <a:schemeClr val="accent1"/>
+          </a:lnRef>
+          <a:fillRef idx="0">
+            <a:schemeClr val="accent1"/>
+          </a:fillRef>
+          <a:effectRef idx="1">
+            <a:schemeClr val="accent1"/>
+          </a:effectRef>
+          <a:fontRef idx="minor">
+            <a:schemeClr val="tx1"/>
+          </a:fontRef>
+        </p:style>
+      </p:cxnSp>
+      <p:sp>
+        <p:nvSpPr>
+          <p:cNvPr id="10" name="Rounded Rectangle 9"/>
+          <p:cNvSpPr/>
+          <p:nvPr/>
+        </p:nvSpPr>
+        <p:spPr>
+          <a:xfrm>
+            <a:off x="7360920" y="1280160"/>
+            <a:ext cx="2148840" cy="2377440"/>
+          </a:xfrm>
+          <a:prstGeom prst="roundRect">
+            <a:avLst/>
+          </a:prstGeom>
+          <a:solidFill>
+            <a:srgbClr val="1E2A3D"/>
+          </a:solidFill>
+          <a:ln w="19050">
+            <a:solidFill>
+              <a:srgbClr val="3DCC85"/>
+            </a:solidFill>
+          </a:ln>
+        </p:spPr>
+        <p:style>
+          <a:lnRef idx="1">
+            <a:schemeClr val="accent1"/>
+          </a:lnRef>
+          <a:fillRef idx="3">
+            <a:schemeClr val="accent1"/>
+          </a:fillRef>
+          <a:effectRef idx="2">
+            <a:schemeClr val="accent1"/>
+          </a:effectRef>
+          <a:fontRef idx="minor">
+            <a:schemeClr val="lt1"/>
+          </a:fontRef>
+        </p:style>
+        <p:txBody>
+          <a:bodyPr wrap="square" lIns="101600" tIns="50800" rIns="101600" bIns="50800" rtlCol="0" anchor="ctr"/>
+          <a:lstStyle/>
+          <a:p>
+            <a:pPr algn="ctr">
+              <a:defRPr sz="1400" b="1">
+                <a:solidFill>
+                  <a:srgbClr val="E8EAED"/>
+                </a:solidFill>
+              </a:defRPr>
+            </a:pPr>
+            <a:r>
+              <a:t>4</a:t>
+            </a:r>
+            <a:br/>
+            <a:r>
+              <a:t>CVAT</a:t>
+            </a:r>
+          </a:p>
+          <a:p>
+            <a:pPr algn="ctr">
+              <a:spcBef>
+                <a:spcPts val="300"/>
+              </a:spcBef>
+              <a:defRPr sz="1100">
+                <a:solidFill>
+                  <a:srgbClr val="9CA3AF"/>
+                </a:solidFill>
+              </a:defRPr>
+            </a:pPr>
+            <a:r>
+              <a:t>создаём задачу</a:t>
+            </a:r>
+            <a:br/>
+            <a:r>
+              <a:t>разметки</a:t>
+            </a:r>
+          </a:p>
+        </p:txBody>
+      </p:sp>
+      <p:cxnSp>
+        <p:nvCxnSpPr>
+          <p:cNvPr id="11" name="Connector 10"/>
+          <p:cNvCxnSpPr/>
+          <p:nvPr/>
+        </p:nvCxnSpPr>
+        <p:spPr>
+          <a:xfrm>
+            <a:off x="9509760" y="2468880"/>
+            <a:ext cx="182880" cy="0"/>
+          </a:xfrm>
+          <a:prstGeom prst="line">
+            <a:avLst/>
+          </a:prstGeom>
+          <a:ln w="25400">
+            <a:solidFill>
+              <a:srgbClr val="3DCC85"/>
+            </a:solidFill>
+          </a:ln>
+        </p:spPr>
+        <p:style>
+          <a:lnRef idx="2">
+            <a:schemeClr val="accent1"/>
+          </a:lnRef>
+          <a:fillRef idx="0">
+            <a:schemeClr val="accent1"/>
+          </a:fillRef>
+          <a:effectRef idx="1">
+            <a:schemeClr val="accent1"/>
+          </a:effectRef>
+          <a:fontRef idx="minor">
+            <a:schemeClr val="tx1"/>
+          </a:fontRef>
+        </p:style>
+      </p:cxnSp>
+      <p:sp>
+        <p:nvSpPr>
+          <p:cNvPr id="12" name="Rounded Rectangle 11"/>
+          <p:cNvSpPr/>
+          <p:nvPr/>
+        </p:nvSpPr>
+        <p:spPr>
+          <a:xfrm>
+            <a:off x="9692640" y="1280160"/>
+            <a:ext cx="2148840" cy="2377440"/>
+          </a:xfrm>
+          <a:prstGeom prst="roundRect">
+            <a:avLst/>
+          </a:prstGeom>
+          <a:solidFill>
+            <a:srgbClr val="1E2A3D"/>
+          </a:solidFill>
+          <a:ln w="19050">
+            <a:solidFill>
+              <a:srgbClr val="E87A7E"/>
+            </a:solidFill>
+          </a:ln>
+        </p:spPr>
+        <p:style>
+          <a:lnRef idx="1">
+            <a:schemeClr val="accent1"/>
+          </a:lnRef>
+          <a:fillRef idx="3">
+            <a:schemeClr val="accent1"/>
+          </a:fillRef>
+          <a:effectRef idx="2">
+            <a:schemeClr val="accent1"/>
+          </a:effectRef>
+          <a:fontRef idx="minor">
+            <a:schemeClr val="lt1"/>
+          </a:fontRef>
+        </p:style>
+        <p:txBody>
+          <a:bodyPr wrap="square" lIns="101600" tIns="50800" rIns="101600" bIns="50800" rtlCol="0" anchor="ctr"/>
+          <a:lstStyle/>
+          <a:p>
+            <a:pPr algn="ctr">
+              <a:defRPr sz="1400" b="1">
+                <a:solidFill>
+                  <a:srgbClr val="E8EAED"/>
+                </a:solidFill>
+              </a:defRPr>
+            </a:pPr>
+            <a:r>
+              <a:t>5</a:t>
+            </a:r>
+            <a:br/>
+            <a:r>
+              <a:t>Пишем назад</a:t>
+            </a:r>
+          </a:p>
+          <a:p>
+            <a:pPr algn="ctr">
+              <a:spcBef>
+                <a:spcPts val="300"/>
+              </a:spcBef>
+              <a:defRPr sz="1100">
+                <a:solidFill>
+                  <a:srgbClr val="9CA3AF"/>
+                </a:solidFill>
+              </a:defRPr>
+            </a:pPr>
+            <a:r>
+              <a:t>cvat_link +</a:t>
+            </a:r>
+            <a:br/>
+            <a:r>
+              <a:t>keypoints GT</a:t>
+            </a:r>
+          </a:p>
+        </p:txBody>
+      </p:sp>
+      <p:sp>
+        <p:nvSpPr>
+          <p:cNvPr id="13" name="Rounded Rectangle 12"/>
+          <p:cNvSpPr/>
+          <p:nvPr/>
+        </p:nvSpPr>
+        <p:spPr>
+          <a:xfrm>
+            <a:off x="411480" y="3931920"/>
+            <a:ext cx="5577840" cy="2011680"/>
+          </a:xfrm>
+          <a:prstGeom prst="roundRect">
+            <a:avLst/>
+          </a:prstGeom>
+          <a:solidFill>
+            <a:srgbClr val="131A2A"/>
+          </a:solidFill>
+          <a:ln w="19050">
+            <a:solidFill>
+              <a:srgbClr val="2DD4BF"/>
+            </a:solidFill>
+          </a:ln>
+        </p:spPr>
+        <p:style>
+          <a:lnRef idx="1">
+            <a:schemeClr val="accent1"/>
+          </a:lnRef>
+          <a:fillRef idx="3">
+            <a:schemeClr val="accent1"/>
+          </a:fillRef>
+          <a:effectRef idx="2">
+            <a:schemeClr val="accent1"/>
+          </a:effectRef>
+          <a:fontRef idx="minor">
+            <a:schemeClr val="lt1"/>
+          </a:fontRef>
+        </p:style>
+        <p:txBody>
+          <a:bodyPr wrap="square" lIns="101600" tIns="50800" rIns="101600" bIns="50800" rtlCol="0" anchor="ctr"/>
+          <a:lstStyle/>
+          <a:p>
+            <a:pPr algn="l">
+              <a:defRPr sz="1500" b="1">
+                <a:solidFill>
+                  <a:srgbClr val="E8EAED"/>
+                </a:solidFill>
+              </a:defRPr>
+            </a:pPr>
+            <a:r>
+              <a:t>Триггер</a:t>
+            </a:r>
+          </a:p>
+          <a:p>
+            <a:pPr algn="l">
+              <a:spcBef>
+                <a:spcPts val="300"/>
+              </a:spcBef>
+              <a:defRPr sz="1300">
+                <a:solidFill>
+                  <a:srgbClr val="9CA3AF"/>
+                </a:solidFill>
+              </a:defRPr>
+            </a:pPr>
+            <a:r>
+              <a:t>commit пакета на сервере</a:t>
+            </a:r>
+            <a:br/>
+            <a:r>
+              <a:t>или webhook CVAT → Datapipe API</a:t>
+            </a:r>
+            <a:br/>
+            <a:r>
+              <a:t>(job в acceptance / completed)</a:t>
+            </a:r>
+          </a:p>
+        </p:txBody>
+      </p:sp>
+      <p:sp>
+        <p:nvSpPr>
+          <p:cNvPr id="14" name="Rounded Rectangle 13"/>
+          <p:cNvSpPr/>
+          <p:nvPr/>
+        </p:nvSpPr>
+        <p:spPr>
+          <a:xfrm>
+            <a:off x="6172200" y="3931920"/>
+            <a:ext cx="5577840" cy="2011680"/>
+          </a:xfrm>
+          <a:prstGeom prst="roundRect">
+            <a:avLst/>
+          </a:prstGeom>
+          <a:solidFill>
+            <a:srgbClr val="131A2A"/>
+          </a:solidFill>
+          <a:ln w="19050">
+            <a:solidFill>
+              <a:srgbClr val="3DCC85"/>
+            </a:solidFill>
+          </a:ln>
+        </p:spPr>
+        <p:style>
+          <a:lnRef idx="1">
+            <a:schemeClr val="accent1"/>
+          </a:lnRef>
+          <a:fillRef idx="3">
+            <a:schemeClr val="accent1"/>
+          </a:fillRef>
+          <a:effectRef idx="2">
+            <a:schemeClr val="accent1"/>
+          </a:effectRef>
+          <a:fontRef idx="minor">
+            <a:schemeClr val="lt1"/>
+          </a:fontRef>
+        </p:style>
+        <p:txBody>
+          <a:bodyPr wrap="square" lIns="101600" tIns="50800" rIns="101600" bIns="50800" rtlCol="0" anchor="ctr"/>
+          <a:lstStyle/>
+          <a:p>
+            <a:pPr algn="l">
+              <a:defRPr sz="1500" b="1">
+                <a:solidFill>
+                  <a:srgbClr val="E8EAED"/>
+                </a:solidFill>
+              </a:defRPr>
+            </a:pPr>
+            <a:r>
+              <a:t>В админке видно</a:t>
+            </a:r>
+          </a:p>
+          <a:p>
+            <a:pPr algn="l">
+              <a:spcBef>
+                <a:spcPts val="300"/>
+              </a:spcBef>
+              <a:defRPr sz="1300">
+                <a:solidFill>
+                  <a:srgbClr val="9CA3AF"/>
+                </a:solidFill>
+              </a:defRPr>
+            </a:pPr>
+            <a:r>
+              <a:t>слой инференса</a:t>
+            </a:r>
+            <a:br/>
+            <a:r>
+              <a:t>ссылка на CVAT</a:t>
+            </a:r>
+            <a:br/>
+            <a:r>
+              <a:t>keypoints после разметки</a:t>
+            </a:r>
+          </a:p>
+        </p:txBody>
+      </p:sp>
+      <p:sp>
+        <p:nvSpPr>
+          <p:cNvPr id="15" name="TextBox 14"/>
+          <p:cNvSpPr txBox="1"/>
+          <p:nvPr/>
+        </p:nvSpPr>
+        <p:spPr>
+          <a:xfrm>
+            <a:off x="502920" y="6537960"/>
+            <a:ext cx="5029200" cy="201168"/>
+          </a:xfrm>
+          <a:prstGeom prst="rect">
+            <a:avLst/>
+          </a:prstGeom>
+          <a:noFill/>
+        </p:spPr>
+        <p:txBody>
+          <a:bodyPr wrap="square" anchor="t">
+            <a:spAutoFit/>
+          </a:bodyPr>
+          <a:lstStyle/>
+          <a:p>
+            <a:pPr algn="l">
+              <a:defRPr sz="800" b="0">
+                <a:solidFill>
+                  <a:srgbClr val="9CA3AF"/>
+                </a:solidFill>
+              </a:defRPr>
+            </a:pPr>
+            <a:r>
+              <a:t>Epoch8 · Architecture</a:t>
+            </a:r>
+          </a:p>
+        </p:txBody>
+      </p:sp>
+      <p:sp>
+        <p:nvSpPr>
+          <p:cNvPr id="16" name="TextBox 15"/>
+          <p:cNvSpPr txBox="1"/>
+          <p:nvPr/>
+        </p:nvSpPr>
+        <p:spPr>
+          <a:xfrm>
+            <a:off x="10972800" y="6537960"/>
+            <a:ext cx="731520" cy="201168"/>
+          </a:xfrm>
+          <a:prstGeom prst="rect">
+            <a:avLst/>
+          </a:prstGeom>
+          <a:noFill/>
+        </p:spPr>
+        <p:txBody>
+          <a:bodyPr wrap="square" anchor="t">
+            <a:spAutoFit/>
+          </a:bodyPr>
+          <a:lstStyle/>
+          <a:p>
+            <a:pPr algn="r">
+              <a:defRPr sz="800" b="0">
+                <a:solidFill>
+                  <a:srgbClr val="9CA3AF"/>
+                </a:solidFill>
+              </a:defRPr>
+            </a:pPr>
+            <a:r>
+              <a:t>10/11</a:t>
+            </a:r>
+          </a:p>
+        </p:txBody>
+      </p:sp>
+    </p:spTree>
+  </p:cSld>
+  <p:clrMapOvr>
+    <a:masterClrMapping/>
+  </p:clrMapOvr>
+</p:sld>
+</file>
+
+<file path=ppt/slides/slide12.xml><?xml version="1.0" encoding="utf-8"?>
+<p:sld xmlns:a="http://schemas.openxmlformats.org/drawingml/2006/main" xmlns:r="http://schemas.openxmlformats.org/officeDocument/2006/relationships" xmlns:p="http://schemas.openxmlformats.org/presentationml/2006/main">
+  <p:cSld>
+    <p:spTree>
+      <p:nvGrpSpPr>
+        <p:cNvPr id="1" name=""/>
+        <p:cNvGrpSpPr/>
+        <p:nvPr/>
+      </p:nvGrpSpPr>
+      <p:grpSpPr>
+        <a:xfrm>
+          <a:off x="0" y="0"/>
+          <a:ext cx="0" cy="0"/>
+          <a:chOff x="0" y="0"/>
+          <a:chExt cx="0" cy="0"/>
+        </a:xfrm>
+      </p:grpSpPr>
+      <p:sp>
+        <p:nvSpPr>
+          <p:cNvPr id="3" name="TextBox 2">
+            <a:extLst>
+              <a:ext uri="{FF2B5EF4-FFF2-40B4-BE49-F238E27FC236}">
+                <a16:creationId xmlns:a16="http://schemas.microsoft.com/office/drawing/2014/main" id="{FD5411B9-2C74-4FE1-A5F8-69731D448532}"/>
+              </a:ext>
+            </a:extLst>
+          </p:cNvPr>
+          <p:cNvSpPr txBox="1"/>
+          <p:nvPr/>
+        </p:nvSpPr>
+        <p:spPr>
+          <a:xfrm>
+            <a:off x="1998440" y="198603"/>
+            <a:ext cx="3624500" cy="6463308"/>
+          </a:xfrm>
+          <a:prstGeom prst="rect">
+            <a:avLst/>
+          </a:prstGeom>
+          <a:noFill/>
+        </p:spPr>
+        <p:txBody>
+          <a:bodyPr wrap="square" rtlCol="0">
+            <a:spAutoFit/>
+          </a:bodyPr>
+          <a:lstStyle/>
+          <a:p>
+            <a:r>
+              <a:rPr lang="ru-RU" dirty="0"/>
+              <a:t>Видео каст инструкция </a:t>
+            </a:r>
+            <a:r>
+              <a:rPr lang="ru-RU" dirty="0" err="1"/>
+              <a:t>пайплайны</a:t>
+            </a:r>
+            <a:r>
+              <a:rPr lang="ru-RU" dirty="0"/>
+              <a:t> в </a:t>
+            </a:r>
+            <a:r>
+              <a:rPr lang="en-US" dirty="0" err="1"/>
+              <a:t>datapipe</a:t>
+            </a:r>
+            <a:r>
+              <a:rPr lang="en-US" dirty="0"/>
+              <a:t> </a:t>
+            </a:r>
+            <a:br>
+              <a:rPr lang="en-US" dirty="0"/>
+            </a:br>
+            <a:br>
+              <a:rPr lang="en-US" dirty="0"/>
+            </a:br>
+            <a:r>
+              <a:rPr lang="ru-RU" dirty="0"/>
+              <a:t>Тут по хорошему видео инструкция с тем как создать </a:t>
+            </a:r>
+            <a:r>
+              <a:rPr lang="ru-RU" dirty="0" err="1"/>
+              <a:t>пайплайн</a:t>
+            </a:r>
+            <a:r>
+              <a:rPr lang="ru-RU" dirty="0"/>
+              <a:t> в </a:t>
+            </a:r>
+            <a:r>
+              <a:rPr lang="ru-RU" dirty="0" err="1"/>
+              <a:t>датапайпе</a:t>
+            </a:r>
+            <a:r>
+              <a:rPr lang="en-US" dirty="0"/>
+              <a:t>, </a:t>
+            </a:r>
+            <a:r>
+              <a:rPr lang="ru-RU" dirty="0"/>
+              <a:t>как смотреть его граф думаю тут берем только </a:t>
+            </a:r>
+            <a:r>
+              <a:rPr lang="ru-RU" dirty="0" err="1"/>
+              <a:t>инференс</a:t>
+            </a:r>
+            <a:r>
+              <a:rPr lang="ru-RU" dirty="0"/>
+              <a:t> и </a:t>
+            </a:r>
+            <a:r>
+              <a:rPr lang="en-US" dirty="0"/>
+              <a:t>CVAT </a:t>
+            </a:r>
+            <a:r>
+              <a:rPr lang="ru-RU" dirty="0"/>
+              <a:t>интеграцию. А вот уже обучение и прочее это в </a:t>
+            </a:r>
+            <a:r>
+              <a:rPr lang="en-US" dirty="0"/>
+              <a:t>CV </a:t>
+            </a:r>
+            <a:r>
+              <a:rPr lang="ru-RU" dirty="0"/>
+              <a:t>презентации </a:t>
+            </a:r>
+            <a:r>
+              <a:rPr lang="en-US" dirty="0" err="1"/>
+              <a:t>datapipe</a:t>
+            </a:r>
+            <a:r>
+              <a:rPr lang="en-US" dirty="0"/>
+              <a:t> </a:t>
+            </a:r>
+            <a:r>
+              <a:rPr lang="ru-RU" dirty="0"/>
+              <a:t>как инструмента</a:t>
+            </a:r>
+            <a:br>
+              <a:rPr lang="ru-RU" dirty="0"/>
+            </a:br>
+            <a:br>
+              <a:rPr lang="ru-RU" dirty="0"/>
+            </a:br>
+            <a:br>
+              <a:rPr lang="ru-RU" dirty="0"/>
+            </a:br>
+            <a:r>
+              <a:rPr lang="ru-RU" dirty="0"/>
+              <a:t>И </a:t>
+            </a:r>
+            <a:r>
+              <a:rPr lang="ru-RU" dirty="0" err="1"/>
+              <a:t>соответвенно</a:t>
+            </a:r>
+            <a:r>
+              <a:rPr lang="ru-RU" dirty="0"/>
+              <a:t>  связь </a:t>
+            </a:r>
+            <a:r>
+              <a:rPr lang="en-US" dirty="0" err="1"/>
+              <a:t>datapipe</a:t>
+            </a:r>
+            <a:r>
+              <a:rPr lang="en-US" dirty="0"/>
+              <a:t> </a:t>
+            </a:r>
+            <a:r>
+              <a:rPr lang="ru-RU" dirty="0"/>
+              <a:t>и </a:t>
+            </a:r>
+            <a:r>
+              <a:rPr lang="en-US" dirty="0" err="1"/>
+              <a:t>datacollector</a:t>
+            </a:r>
+            <a:r>
+              <a:rPr lang="en-US" dirty="0"/>
+              <a:t> </a:t>
+            </a:r>
+            <a:r>
+              <a:rPr lang="ru-RU" dirty="0"/>
+              <a:t>по сути это наш </a:t>
+            </a:r>
+            <a:r>
+              <a:rPr lang="en-US" dirty="0" err="1"/>
+              <a:t>pipeline.json</a:t>
+            </a:r>
+            <a:r>
+              <a:rPr lang="en-US" dirty="0"/>
+              <a:t> </a:t>
+            </a:r>
+            <a:r>
+              <a:rPr lang="ru-RU" dirty="0"/>
+              <a:t>который </a:t>
+            </a:r>
+            <a:r>
+              <a:rPr lang="ru-RU" dirty="0" err="1"/>
+              <a:t>дерагет</a:t>
+            </a:r>
+            <a:r>
+              <a:rPr lang="ru-RU" dirty="0"/>
+              <a:t> ручку</a:t>
+            </a:r>
+            <a:br>
+              <a:rPr lang="ru-RU" dirty="0"/>
+            </a:br>
+            <a:br>
+              <a:rPr lang="ru-RU" dirty="0"/>
+            </a:br>
+            <a:br>
+              <a:rPr lang="ru-RU" dirty="0"/>
+            </a:br>
+            <a:br>
+              <a:rPr lang="ru-RU" dirty="0"/>
+            </a:br>
+            <a:br>
+              <a:rPr lang="ru-RU" dirty="0"/>
+            </a:br>
+            <a:br>
+              <a:rPr lang="en-US" dirty="0"/>
+            </a:br>
+            <a:endParaRPr lang="ru-RU" dirty="0"/>
+          </a:p>
+        </p:txBody>
+      </p:sp>
+    </p:spTree>
+    <p:extLst>
+      <p:ext uri="{BB962C8B-B14F-4D97-AF65-F5344CB8AC3E}">
+        <p14:creationId xmlns:p14="http://schemas.microsoft.com/office/powerpoint/2010/main" val="1042243331"/>
+      </p:ext>
+    </p:extLst>
+  </p:cSld>
+  <p:clrMapOvr>
+    <a:masterClrMapping/>
+  </p:clrMapOvr>
+</p:sld>
+</file>
+
+<file path=ppt/slides/slide13.xml><?xml version="1.0" encoding="utf-8"?>
+<p:sld xmlns:a="http://schemas.openxmlformats.org/drawingml/2006/main" xmlns:r="http://schemas.openxmlformats.org/officeDocument/2006/relationships" xmlns:p="http://schemas.openxmlformats.org/presentationml/2006/main">
+  <p:cSld>
+    <p:bg>
+      <p:bgPr>
+        <a:solidFill>
+          <a:srgbClr val="090D16"/>
+        </a:solidFill>
+        <a:effectLst/>
+      </p:bgPr>
+    </p:bg>
+    <p:spTree>
+      <p:nvGrpSpPr>
+        <p:cNvPr id="1" name=""/>
+        <p:cNvGrpSpPr/>
+        <p:nvPr/>
+      </p:nvGrpSpPr>
+      <p:grpSpPr>
+        <a:xfrm>
+          <a:off x="0" y="0"/>
+          <a:ext cx="0" cy="0"/>
+          <a:chOff x="0" y="0"/>
+          <a:chExt cx="0" cy="0"/>
+        </a:xfrm>
+      </p:grpSpPr>
+      <p:sp>
+        <p:nvSpPr>
+          <p:cNvPr id="2" name="TextBox 1"/>
+          <p:cNvSpPr txBox="1"/>
+          <p:nvPr/>
+        </p:nvSpPr>
+        <p:spPr>
+          <a:xfrm>
+            <a:off x="502920" y="256032"/>
+            <a:ext cx="11155680" cy="411480"/>
+          </a:xfrm>
+          <a:prstGeom prst="rect">
+            <a:avLst/>
+          </a:prstGeom>
+          <a:noFill/>
+        </p:spPr>
+        <p:txBody>
+          <a:bodyPr wrap="square" anchor="t">
+            <a:spAutoFit/>
+          </a:bodyPr>
+          <a:lstStyle/>
+          <a:p>
+            <a:pPr algn="l">
+              <a:defRPr sz="2400" b="1">
+                <a:solidFill>
+                  <a:srgbClr val="E8EAED"/>
+                </a:solidFill>
+              </a:defRPr>
+            </a:pPr>
+            <a:r>
               <a:t>Где искать сбой</a:t>
             </a:r>
           </a:p>
@@ -5895,6 +7015,116 @@
         </p:txBody>
       </p:sp>
     </p:spTree>
+  </p:cSld>
+  <p:clrMapOvr>
+    <a:masterClrMapping/>
+  </p:clrMapOvr>
+</p:sld>
+</file>
+
+<file path=ppt/slides/slide14.xml><?xml version="1.0" encoding="utf-8"?>
+<p:sld xmlns:a="http://schemas.openxmlformats.org/drawingml/2006/main" xmlns:r="http://schemas.openxmlformats.org/officeDocument/2006/relationships" xmlns:p="http://schemas.openxmlformats.org/presentationml/2006/main">
+  <p:cSld>
+    <p:spTree>
+      <p:nvGrpSpPr>
+        <p:cNvPr id="1" name=""/>
+        <p:cNvGrpSpPr/>
+        <p:nvPr/>
+      </p:nvGrpSpPr>
+      <p:grpSpPr>
+        <a:xfrm>
+          <a:off x="0" y="0"/>
+          <a:ext cx="0" cy="0"/>
+          <a:chOff x="0" y="0"/>
+          <a:chExt cx="0" cy="0"/>
+        </a:xfrm>
+      </p:grpSpPr>
+      <p:sp>
+        <p:nvSpPr>
+          <p:cNvPr id="3" name="TextBox 2">
+            <a:extLst>
+              <a:ext uri="{FF2B5EF4-FFF2-40B4-BE49-F238E27FC236}">
+                <a16:creationId xmlns:a16="http://schemas.microsoft.com/office/drawing/2014/main" id="{FD5411B9-2C74-4FE1-A5F8-69731D448532}"/>
+              </a:ext>
+            </a:extLst>
+          </p:cNvPr>
+          <p:cNvSpPr txBox="1"/>
+          <p:nvPr/>
+        </p:nvSpPr>
+        <p:spPr>
+          <a:xfrm>
+            <a:off x="1998440" y="198603"/>
+            <a:ext cx="3624500" cy="4524315"/>
+          </a:xfrm>
+          <a:prstGeom prst="rect">
+            <a:avLst/>
+          </a:prstGeom>
+          <a:noFill/>
+        </p:spPr>
+        <p:txBody>
+          <a:bodyPr wrap="square" rtlCol="0">
+            <a:spAutoFit/>
+          </a:bodyPr>
+          <a:lstStyle/>
+          <a:p>
+            <a:r>
+              <a:rPr lang="ru-RU" dirty="0"/>
+              <a:t>Видео каст инструкция «типичные ошибки»</a:t>
+            </a:r>
+            <a:br>
+              <a:rPr lang="ru-RU" dirty="0"/>
+            </a:br>
+            <a:br>
+              <a:rPr lang="ru-RU" dirty="0"/>
+            </a:br>
+            <a:r>
+              <a:rPr lang="ru-RU" dirty="0"/>
+              <a:t>Тут думаю такая видео нарезка из типичных проблем которые могут </a:t>
+            </a:r>
+            <a:r>
+              <a:rPr lang="ru-RU" dirty="0" err="1"/>
+              <a:t>возникунть</a:t>
+            </a:r>
+            <a:r>
+              <a:rPr lang="ru-RU" dirty="0"/>
+              <a:t> (слайд выше) и то как их решать и как они выглядят в интерфейсе. Мб это даже просто инструкция</a:t>
+            </a:r>
+            <a:r>
+              <a:rPr lang="en-US" dirty="0"/>
+              <a:t>, </a:t>
+            </a:r>
+            <a:r>
+              <a:rPr lang="ru-RU" dirty="0"/>
+              <a:t>но думаю и видео и документ это лучше</a:t>
+            </a:r>
+            <a:br>
+              <a:rPr lang="ru-RU" dirty="0"/>
+            </a:br>
+            <a:br>
+              <a:rPr lang="ru-RU" dirty="0"/>
+            </a:br>
+            <a:br>
+              <a:rPr lang="ru-RU" dirty="0"/>
+            </a:br>
+            <a:br>
+              <a:rPr lang="ru-RU" dirty="0"/>
+            </a:br>
+            <a:br>
+              <a:rPr lang="ru-RU" dirty="0"/>
+            </a:br>
+            <a:br>
+              <a:rPr lang="en-US" dirty="0"/>
+            </a:br>
+            <a:endParaRPr lang="ru-RU" dirty="0"/>
+          </a:p>
+        </p:txBody>
+      </p:sp>
+    </p:spTree>
+    <p:extLst>
+      <p:ext uri="{BB962C8B-B14F-4D97-AF65-F5344CB8AC3E}">
+        <p14:creationId xmlns:p14="http://schemas.microsoft.com/office/powerpoint/2010/main" val="3898323604"/>
+      </p:ext>
+    </p:extLst>
   </p:cSld>
   <p:clrMapOvr>
     <a:masterClrMapping/>
@@ -11519,7 +12749,7 @@
         </p:nvSpPr>
         <p:spPr>
           <a:xfrm>
-            <a:off x="548640" y="1124712"/>
+            <a:off x="685800" y="1156447"/>
             <a:ext cx="5303520" cy="256032"/>
           </a:xfrm>
           <a:prstGeom prst="rect">
@@ -11541,6 +12771,7 @@
               </a:defRPr>
             </a:pPr>
             <a:r>
+              <a:rPr dirty="0"/>
               <a:t>ПРИЁМ ПАКЕТОВ</a:t>
             </a:r>
           </a:p>
@@ -13710,14 +14941,6 @@
 <file path=ppt/slides/slide9.xml><?xml version="1.0" encoding="utf-8"?>
 <p:sld xmlns:a="http://schemas.openxmlformats.org/drawingml/2006/main" xmlns:r="http://schemas.openxmlformats.org/officeDocument/2006/relationships" xmlns:p="http://schemas.openxmlformats.org/presentationml/2006/main">
   <p:cSld>
-    <p:bg>
-      <p:bgPr>
-        <a:solidFill>
-          <a:srgbClr val="090D16"/>
-        </a:solidFill>
-        <a:effectLst/>
-      </p:bgPr>
-    </p:bg>
     <p:spTree>
       <p:nvGrpSpPr>
         <p:cNvPr id="1" name=""/>
@@ -13734,14 +14957,20 @@
       </p:grpSpPr>
       <p:sp>
         <p:nvSpPr>
-          <p:cNvPr id="2" name="TextBox 1"/>
+          <p:cNvPr id="3" name="TextBox 2">
+            <a:extLst>
+              <a:ext uri="{FF2B5EF4-FFF2-40B4-BE49-F238E27FC236}">
+                <a16:creationId xmlns:a16="http://schemas.microsoft.com/office/drawing/2014/main" id="{FD5411B9-2C74-4FE1-A5F8-69731D448532}"/>
+              </a:ext>
+            </a:extLst>
+          </p:cNvPr>
           <p:cNvSpPr txBox="1"/>
           <p:nvPr/>
         </p:nvSpPr>
         <p:spPr>
           <a:xfrm>
-            <a:off x="502920" y="256032"/>
-            <a:ext cx="11155680" cy="411480"/>
+            <a:off x="1998440" y="198603"/>
+            <a:ext cx="3624500" cy="7294305"/>
           </a:xfrm>
           <a:prstGeom prst="rect">
             <a:avLst/>
@@ -13749,843 +14978,164 @@
           <a:noFill/>
         </p:spPr>
         <p:txBody>
-          <a:bodyPr wrap="square" anchor="t">
+          <a:bodyPr wrap="square" rtlCol="0">
             <a:spAutoFit/>
           </a:bodyPr>
           <a:lstStyle/>
           <a:p>
-            <a:pPr algn="l">
-              <a:defRPr sz="2400" b="1">
-                <a:solidFill>
-                  <a:srgbClr val="E8EAED"/>
-                </a:solidFill>
-              </a:defRPr>
-            </a:pPr>
-            <a:r>
-              <a:t>Datapipe: keypoints коров</a:t>
-            </a:r>
-          </a:p>
-        </p:txBody>
-      </p:sp>
-      <p:sp>
-        <p:nvSpPr>
-          <p:cNvPr id="3" name="TextBox 2"/>
-          <p:cNvSpPr txBox="1"/>
-          <p:nvPr/>
-        </p:nvSpPr>
-        <p:spPr>
-          <a:xfrm>
-            <a:off x="502920" y="658368"/>
-            <a:ext cx="11155680" cy="256032"/>
-          </a:xfrm>
-          <a:prstGeom prst="rect">
-            <a:avLst/>
-          </a:prstGeom>
-          <a:noFill/>
-        </p:spPr>
-        <p:txBody>
-          <a:bodyPr wrap="square" anchor="t">
-            <a:spAutoFit/>
-          </a:bodyPr>
-          <a:lstStyle/>
-          <a:p>
-            <a:pPr algn="l">
-              <a:defRPr sz="1100" b="0">
-                <a:solidFill>
-                  <a:srgbClr val="9CA3AF"/>
-                </a:solidFill>
-              </a:defRPr>
-            </a:pPr>
-            <a:r>
-              <a:t>пакеты → CVAT → обучение → prod</a:t>
-            </a:r>
-          </a:p>
-        </p:txBody>
-      </p:sp>
-      <p:sp>
-        <p:nvSpPr>
-          <p:cNvPr id="4" name="Rounded Rectangle 3"/>
-          <p:cNvSpPr/>
-          <p:nvPr/>
-        </p:nvSpPr>
-        <p:spPr>
-          <a:xfrm>
-            <a:off x="411480" y="1051560"/>
-            <a:ext cx="11338560" cy="777240"/>
-          </a:xfrm>
-          <a:prstGeom prst="roundRect">
-            <a:avLst/>
-          </a:prstGeom>
-          <a:solidFill>
-            <a:srgbClr val="1E2A3D"/>
-          </a:solidFill>
-          <a:ln w="19050">
-            <a:solidFill>
-              <a:srgbClr val="2DD4BF"/>
-            </a:solidFill>
-          </a:ln>
-        </p:spPr>
-        <p:style>
-          <a:lnRef idx="1">
-            <a:schemeClr val="accent1"/>
-          </a:lnRef>
-          <a:fillRef idx="3">
-            <a:schemeClr val="accent1"/>
-          </a:fillRef>
-          <a:effectRef idx="2">
-            <a:schemeClr val="accent1"/>
-          </a:effectRef>
-          <a:fontRef idx="minor">
-            <a:schemeClr val="lt1"/>
-          </a:fontRef>
-        </p:style>
-        <p:txBody>
-          <a:bodyPr wrap="square" lIns="101600" tIns="50800" rIns="101600" bIns="50800" rtlCol="0" anchor="ctr"/>
-          <a:lstStyle/>
-          <a:p>
-            <a:pPr algn="ctr">
-              <a:defRPr sz="1400" b="1">
-                <a:solidFill>
-                  <a:srgbClr val="E8EAED"/>
-                </a:solidFill>
-              </a:defRPr>
-            </a:pPr>
-            <a:r>
-              <a:t>Два входа:  новые пакеты из БД проекта  ·  разметка из всех проектов CVAT</a:t>
-            </a:r>
-          </a:p>
-        </p:txBody>
-      </p:sp>
-      <p:sp>
-        <p:nvSpPr>
-          <p:cNvPr id="5" name="Rounded Rectangle 4"/>
-          <p:cNvSpPr/>
-          <p:nvPr/>
-        </p:nvSpPr>
-        <p:spPr>
-          <a:xfrm>
-            <a:off x="365760" y="2057400"/>
-            <a:ext cx="2194560" cy="2651760"/>
-          </a:xfrm>
-          <a:prstGeom prst="roundRect">
-            <a:avLst/>
-          </a:prstGeom>
-          <a:solidFill>
-            <a:srgbClr val="1E2A3D"/>
-          </a:solidFill>
-          <a:ln w="19050">
-            <a:solidFill>
-              <a:srgbClr val="5B8DEF"/>
-            </a:solidFill>
-          </a:ln>
-        </p:spPr>
-        <p:style>
-          <a:lnRef idx="1">
-            <a:schemeClr val="accent1"/>
-          </a:lnRef>
-          <a:fillRef idx="3">
-            <a:schemeClr val="accent1"/>
-          </a:fillRef>
-          <a:effectRef idx="2">
-            <a:schemeClr val="accent1"/>
-          </a:effectRef>
-          <a:fontRef idx="minor">
-            <a:schemeClr val="lt1"/>
-          </a:fontRef>
-        </p:style>
-        <p:txBody>
-          <a:bodyPr wrap="square" lIns="101600" tIns="50800" rIns="101600" bIns="50800" rtlCol="0" anchor="ctr"/>
-          <a:lstStyle/>
-          <a:p>
-            <a:pPr algn="ctr">
-              <a:defRPr sz="1400" b="1">
-                <a:solidFill>
-                  <a:srgbClr val="E8EAED"/>
-                </a:solidFill>
-              </a:defRPr>
-            </a:pPr>
-            <a:r>
-              <a:t>0  Пакеты</a:t>
-            </a:r>
-          </a:p>
-          <a:p>
-            <a:pPr algn="ctr">
-              <a:spcBef>
-                <a:spcPts val="300"/>
-              </a:spcBef>
-              <a:defRPr sz="1100">
-                <a:solidFill>
-                  <a:srgbClr val="9CA3AF"/>
-                </a:solidFill>
-              </a:defRPr>
-            </a:pPr>
-            <a:r>
-              <a:t>из БД проекта:</a:t>
-            </a:r>
-            <a:br/>
-            <a:r>
-              <a:t>фото → Gradio →</a:t>
-            </a:r>
-            <a:br/>
-            <a:r>
-              <a:t>CVAT → обратно в БД</a:t>
-            </a:r>
-          </a:p>
-        </p:txBody>
-      </p:sp>
-      <p:cxnSp>
-        <p:nvCxnSpPr>
-          <p:cNvPr id="6" name="Connector 5"/>
-          <p:cNvCxnSpPr/>
-          <p:nvPr/>
-        </p:nvCxnSpPr>
-        <p:spPr>
-          <a:xfrm>
-            <a:off x="2560320" y="3383280"/>
-            <a:ext cx="137160" cy="0"/>
-          </a:xfrm>
-          <a:prstGeom prst="line">
-            <a:avLst/>
-          </a:prstGeom>
-          <a:ln w="25400">
-            <a:solidFill>
-              <a:srgbClr val="5B8DEF"/>
-            </a:solidFill>
-          </a:ln>
-        </p:spPr>
-        <p:style>
-          <a:lnRef idx="2">
-            <a:schemeClr val="accent1"/>
-          </a:lnRef>
-          <a:fillRef idx="0">
-            <a:schemeClr val="accent1"/>
-          </a:fillRef>
-          <a:effectRef idx="1">
-            <a:schemeClr val="accent1"/>
-          </a:effectRef>
-          <a:fontRef idx="minor">
-            <a:schemeClr val="tx1"/>
-          </a:fontRef>
-        </p:style>
-      </p:cxnSp>
-      <p:sp>
-        <p:nvSpPr>
-          <p:cNvPr id="7" name="Rounded Rectangle 6"/>
-          <p:cNvSpPr/>
-          <p:nvPr/>
-        </p:nvSpPr>
-        <p:spPr>
-          <a:xfrm>
-            <a:off x="2697480" y="2057400"/>
-            <a:ext cx="2194560" cy="2651760"/>
-          </a:xfrm>
-          <a:prstGeom prst="roundRect">
-            <a:avLst/>
-          </a:prstGeom>
-          <a:solidFill>
-            <a:srgbClr val="1E2A3D"/>
-          </a:solidFill>
-          <a:ln w="19050">
-            <a:solidFill>
-              <a:srgbClr val="3DCC85"/>
-            </a:solidFill>
-          </a:ln>
-        </p:spPr>
-        <p:style>
-          <a:lnRef idx="1">
-            <a:schemeClr val="accent1"/>
-          </a:lnRef>
-          <a:fillRef idx="3">
-            <a:schemeClr val="accent1"/>
-          </a:fillRef>
-          <a:effectRef idx="2">
-            <a:schemeClr val="accent1"/>
-          </a:effectRef>
-          <a:fontRef idx="minor">
-            <a:schemeClr val="lt1"/>
-          </a:fontRef>
-        </p:style>
-        <p:txBody>
-          <a:bodyPr wrap="square" lIns="101600" tIns="50800" rIns="101600" bIns="50800" rtlCol="0" anchor="ctr"/>
-          <a:lstStyle/>
-          <a:p>
-            <a:pPr algn="ctr">
-              <a:defRPr sz="1400" b="1">
-                <a:solidFill>
-                  <a:srgbClr val="E8EAED"/>
-                </a:solidFill>
-              </a:defRPr>
-            </a:pPr>
-            <a:r>
-              <a:t>1  Аннотация</a:t>
-            </a:r>
-          </a:p>
-          <a:p>
-            <a:pPr algn="ctr">
-              <a:spcBef>
-                <a:spcPts val="300"/>
-              </a:spcBef>
-              <a:defRPr sz="1100">
-                <a:solidFill>
-                  <a:srgbClr val="9CA3AF"/>
-                </a:solidFill>
-              </a:defRPr>
-            </a:pPr>
-            <a:r>
-              <a:t>все проекты CVAT:</a:t>
-            </a:r>
-            <a:br/>
-            <a:r>
-              <a:t>разметка → bbox →</a:t>
-            </a:r>
-            <a:br/>
-            <a:r>
-              <a:t>dataset train/val/test</a:t>
-            </a:r>
-          </a:p>
-        </p:txBody>
-      </p:sp>
-      <p:cxnSp>
-        <p:nvCxnSpPr>
-          <p:cNvPr id="8" name="Connector 7"/>
-          <p:cNvCxnSpPr/>
-          <p:nvPr/>
-        </p:nvCxnSpPr>
-        <p:spPr>
-          <a:xfrm>
-            <a:off x="4892040" y="3383280"/>
-            <a:ext cx="137160" cy="0"/>
-          </a:xfrm>
-          <a:prstGeom prst="line">
-            <a:avLst/>
-          </a:prstGeom>
-          <a:ln w="25400">
-            <a:solidFill>
-              <a:srgbClr val="3DCC85"/>
-            </a:solidFill>
-          </a:ln>
-        </p:spPr>
-        <p:style>
-          <a:lnRef idx="2">
-            <a:schemeClr val="accent1"/>
-          </a:lnRef>
-          <a:fillRef idx="0">
-            <a:schemeClr val="accent1"/>
-          </a:fillRef>
-          <a:effectRef idx="1">
-            <a:schemeClr val="accent1"/>
-          </a:effectRef>
-          <a:fontRef idx="minor">
-            <a:schemeClr val="tx1"/>
-          </a:fontRef>
-        </p:style>
-      </p:cxnSp>
-      <p:sp>
-        <p:nvSpPr>
-          <p:cNvPr id="9" name="Rounded Rectangle 8"/>
-          <p:cNvSpPr/>
-          <p:nvPr/>
-        </p:nvSpPr>
-        <p:spPr>
-          <a:xfrm>
-            <a:off x="5029200" y="2057400"/>
-            <a:ext cx="2194560" cy="2651760"/>
-          </a:xfrm>
-          <a:prstGeom prst="roundRect">
-            <a:avLst/>
-          </a:prstGeom>
-          <a:solidFill>
-            <a:srgbClr val="1E2A3D"/>
-          </a:solidFill>
-          <a:ln w="19050">
-            <a:solidFill>
-              <a:srgbClr val="D4A84B"/>
-            </a:solidFill>
-          </a:ln>
-        </p:spPr>
-        <p:style>
-          <a:lnRef idx="1">
-            <a:schemeClr val="accent1"/>
-          </a:lnRef>
-          <a:fillRef idx="3">
-            <a:schemeClr val="accent1"/>
-          </a:fillRef>
-          <a:effectRef idx="2">
-            <a:schemeClr val="accent1"/>
-          </a:effectRef>
-          <a:fontRef idx="minor">
-            <a:schemeClr val="lt1"/>
-          </a:fontRef>
-        </p:style>
-        <p:txBody>
-          <a:bodyPr wrap="square" lIns="101600" tIns="50800" rIns="101600" bIns="50800" rtlCol="0" anchor="ctr"/>
-          <a:lstStyle/>
-          <a:p>
-            <a:pPr algn="ctr">
-              <a:defRPr sz="1400" b="1">
-                <a:solidFill>
-                  <a:srgbClr val="E8EAED"/>
-                </a:solidFill>
-              </a:defRPr>
-            </a:pPr>
-            <a:r>
-              <a:t>2  Обучение</a:t>
-            </a:r>
-          </a:p>
-          <a:p>
-            <a:pPr algn="ctr">
-              <a:spcBef>
-                <a:spcPts val="300"/>
-              </a:spcBef>
-              <a:defRPr sz="1100">
-                <a:solidFill>
-                  <a:srgbClr val="9CA3AF"/>
-                </a:solidFill>
-              </a:defRPr>
-            </a:pPr>
-            <a:r>
-              <a:t>заморозка датасета</a:t>
-            </a:r>
-            <a:br/>
-            <a:r>
-              <a:t>train keypoints</a:t>
-            </a:r>
-            <a:br/>
-            <a:r>
-              <a:t>выбор лучшей</a:t>
-            </a:r>
-          </a:p>
-        </p:txBody>
-      </p:sp>
-      <p:cxnSp>
-        <p:nvCxnSpPr>
-          <p:cNvPr id="10" name="Connector 9"/>
-          <p:cNvCxnSpPr/>
-          <p:nvPr/>
-        </p:nvCxnSpPr>
-        <p:spPr>
-          <a:xfrm>
-            <a:off x="7223760" y="3383280"/>
-            <a:ext cx="137160" cy="0"/>
-          </a:xfrm>
-          <a:prstGeom prst="line">
-            <a:avLst/>
-          </a:prstGeom>
-          <a:ln w="25400">
-            <a:solidFill>
-              <a:srgbClr val="D4A84B"/>
-            </a:solidFill>
-          </a:ln>
-        </p:spPr>
-        <p:style>
-          <a:lnRef idx="2">
-            <a:schemeClr val="accent1"/>
-          </a:lnRef>
-          <a:fillRef idx="0">
-            <a:schemeClr val="accent1"/>
-          </a:fillRef>
-          <a:effectRef idx="1">
-            <a:schemeClr val="accent1"/>
-          </a:effectRef>
-          <a:fontRef idx="minor">
-            <a:schemeClr val="tx1"/>
-          </a:fontRef>
-        </p:style>
-      </p:cxnSp>
-      <p:sp>
-        <p:nvSpPr>
-          <p:cNvPr id="11" name="Rounded Rectangle 10"/>
-          <p:cNvSpPr/>
-          <p:nvPr/>
-        </p:nvSpPr>
-        <p:spPr>
-          <a:xfrm>
-            <a:off x="7360920" y="2057400"/>
-            <a:ext cx="2194560" cy="2651760"/>
-          </a:xfrm>
-          <a:prstGeom prst="roundRect">
-            <a:avLst/>
-          </a:prstGeom>
-          <a:solidFill>
-            <a:srgbClr val="1E2A3D"/>
-          </a:solidFill>
-          <a:ln w="19050">
-            <a:solidFill>
-              <a:srgbClr val="9B7ED0"/>
-            </a:solidFill>
-          </a:ln>
-        </p:spPr>
-        <p:style>
-          <a:lnRef idx="1">
-            <a:schemeClr val="accent1"/>
-          </a:lnRef>
-          <a:fillRef idx="3">
-            <a:schemeClr val="accent1"/>
-          </a:fillRef>
-          <a:effectRef idx="2">
-            <a:schemeClr val="accent1"/>
-          </a:effectRef>
-          <a:fontRef idx="minor">
-            <a:schemeClr val="lt1"/>
-          </a:fontRef>
-        </p:style>
-        <p:txBody>
-          <a:bodyPr wrap="square" lIns="101600" tIns="50800" rIns="101600" bIns="50800" rtlCol="0" anchor="ctr"/>
-          <a:lstStyle/>
-          <a:p>
-            <a:pPr algn="ctr">
-              <a:defRPr sz="1400" b="1">
-                <a:solidFill>
-                  <a:srgbClr val="E8EAED"/>
-                </a:solidFill>
-              </a:defRPr>
-            </a:pPr>
-            <a:r>
-              <a:t>3  FiftyOne</a:t>
-            </a:r>
-          </a:p>
-          <a:p>
-            <a:pPr algn="ctr">
-              <a:spcBef>
-                <a:spcPts val="300"/>
-              </a:spcBef>
-              <a:defRPr sz="1100">
-                <a:solidFill>
-                  <a:srgbClr val="9CA3AF"/>
-                </a:solidFill>
-              </a:defRPr>
-            </a:pPr>
-            <a:r>
-              <a:t>публикация GT</a:t>
-            </a:r>
-            <a:br/>
-            <a:r>
-              <a:t>и предсказаний</a:t>
-            </a:r>
-          </a:p>
-        </p:txBody>
-      </p:sp>
-      <p:cxnSp>
-        <p:nvCxnSpPr>
-          <p:cNvPr id="12" name="Connector 11"/>
-          <p:cNvCxnSpPr/>
-          <p:nvPr/>
-        </p:nvCxnSpPr>
-        <p:spPr>
-          <a:xfrm>
-            <a:off x="9555480" y="3383280"/>
-            <a:ext cx="137160" cy="0"/>
-          </a:xfrm>
-          <a:prstGeom prst="line">
-            <a:avLst/>
-          </a:prstGeom>
-          <a:ln w="25400">
-            <a:solidFill>
-              <a:srgbClr val="9B7ED0"/>
-            </a:solidFill>
-          </a:ln>
-        </p:spPr>
-        <p:style>
-          <a:lnRef idx="2">
-            <a:schemeClr val="accent1"/>
-          </a:lnRef>
-          <a:fillRef idx="0">
-            <a:schemeClr val="accent1"/>
-          </a:fillRef>
-          <a:effectRef idx="1">
-            <a:schemeClr val="accent1"/>
-          </a:effectRef>
-          <a:fontRef idx="minor">
-            <a:schemeClr val="tx1"/>
-          </a:fontRef>
-        </p:style>
-      </p:cxnSp>
-      <p:sp>
-        <p:nvSpPr>
-          <p:cNvPr id="13" name="Rounded Rectangle 12"/>
-          <p:cNvSpPr/>
-          <p:nvPr/>
-        </p:nvSpPr>
-        <p:spPr>
-          <a:xfrm>
-            <a:off x="9692640" y="2057400"/>
-            <a:ext cx="2194560" cy="2651760"/>
-          </a:xfrm>
-          <a:prstGeom prst="roundRect">
-            <a:avLst/>
-          </a:prstGeom>
-          <a:solidFill>
-            <a:srgbClr val="1E2A3D"/>
-          </a:solidFill>
-          <a:ln w="19050">
-            <a:solidFill>
-              <a:srgbClr val="E87A7E"/>
-            </a:solidFill>
-          </a:ln>
-        </p:spPr>
-        <p:style>
-          <a:lnRef idx="1">
-            <a:schemeClr val="accent1"/>
-          </a:lnRef>
-          <a:fillRef idx="3">
-            <a:schemeClr val="accent1"/>
-          </a:fillRef>
-          <a:effectRef idx="2">
-            <a:schemeClr val="accent1"/>
-          </a:effectRef>
-          <a:fontRef idx="minor">
-            <a:schemeClr val="lt1"/>
-          </a:fontRef>
-        </p:style>
-        <p:txBody>
-          <a:bodyPr wrap="square" lIns="101600" tIns="50800" rIns="101600" bIns="50800" rtlCol="0" anchor="ctr"/>
-          <a:lstStyle/>
-          <a:p>
-            <a:pPr algn="ctr">
-              <a:defRPr sz="1400" b="1">
-                <a:solidFill>
-                  <a:srgbClr val="E8EAED"/>
-                </a:solidFill>
-              </a:defRPr>
-            </a:pPr>
-            <a:r>
-              <a:t>4  Prod</a:t>
-            </a:r>
-          </a:p>
-          <a:p>
-            <a:pPr algn="ctr">
-              <a:spcBef>
-                <a:spcPts val="300"/>
-              </a:spcBef>
-              <a:defRPr sz="1100">
-                <a:solidFill>
-                  <a:srgbClr val="9CA3AF"/>
-                </a:solidFill>
-              </a:defRPr>
-            </a:pPr>
-            <a:r>
-              <a:t>боевая модель</a:t>
-            </a:r>
-            <a:br/>
-            <a:r>
-              <a:t>инференс → БД</a:t>
-            </a:r>
-            <a:br/>
-            <a:r>
-              <a:t>слой в админке</a:t>
-            </a:r>
-          </a:p>
-        </p:txBody>
-      </p:sp>
-      <p:sp>
-        <p:nvSpPr>
-          <p:cNvPr id="14" name="Rounded Rectangle 13"/>
-          <p:cNvSpPr/>
-          <p:nvPr/>
-        </p:nvSpPr>
-        <p:spPr>
-          <a:xfrm>
-            <a:off x="411480" y="4983480"/>
-            <a:ext cx="5577840" cy="1143000"/>
-          </a:xfrm>
-          <a:prstGeom prst="roundRect">
-            <a:avLst/>
-          </a:prstGeom>
-          <a:solidFill>
-            <a:srgbClr val="131A2A"/>
-          </a:solidFill>
-          <a:ln w="19050">
-            <a:solidFill>
-              <a:srgbClr val="5B8DEF"/>
-            </a:solidFill>
-          </a:ln>
-        </p:spPr>
-        <p:style>
-          <a:lnRef idx="1">
-            <a:schemeClr val="accent1"/>
-          </a:lnRef>
-          <a:fillRef idx="3">
-            <a:schemeClr val="accent1"/>
-          </a:fillRef>
-          <a:effectRef idx="2">
-            <a:schemeClr val="accent1"/>
-          </a:effectRef>
-          <a:fontRef idx="minor">
-            <a:schemeClr val="lt1"/>
-          </a:fontRef>
-        </p:style>
-        <p:txBody>
-          <a:bodyPr wrap="square" lIns="101600" tIns="50800" rIns="101600" bIns="50800" rtlCol="0" anchor="ctr"/>
-          <a:lstStyle/>
-          <a:p>
-            <a:pPr algn="ctr">
-              <a:defRPr sz="1400" b="1">
-                <a:solidFill>
-                  <a:srgbClr val="E8EAED"/>
-                </a:solidFill>
-              </a:defRPr>
-            </a:pPr>
-            <a:r>
-              <a:t>На каждый пакет</a:t>
-            </a:r>
-          </a:p>
-          <a:p>
-            <a:pPr algn="ctr">
-              <a:spcBef>
-                <a:spcPts val="300"/>
-              </a:spcBef>
-              <a:defRPr sz="1200">
-                <a:solidFill>
-                  <a:srgbClr val="9CA3AF"/>
-                </a:solidFill>
-              </a:defRPr>
-            </a:pPr>
-            <a:r>
-              <a:t>стадия 0 · после commit / webhook CVAT</a:t>
-            </a:r>
-          </a:p>
-        </p:txBody>
-      </p:sp>
-      <p:sp>
-        <p:nvSpPr>
-          <p:cNvPr id="15" name="Rounded Rectangle 14"/>
-          <p:cNvSpPr/>
-          <p:nvPr/>
-        </p:nvSpPr>
-        <p:spPr>
-          <a:xfrm>
-            <a:off x="6172200" y="4983480"/>
-            <a:ext cx="5577840" cy="1143000"/>
-          </a:xfrm>
-          <a:prstGeom prst="roundRect">
-            <a:avLst/>
-          </a:prstGeom>
-          <a:solidFill>
-            <a:srgbClr val="131A2A"/>
-          </a:solidFill>
-          <a:ln w="19050">
-            <a:solidFill>
-              <a:srgbClr val="E87A7E"/>
-            </a:solidFill>
-          </a:ln>
-        </p:spPr>
-        <p:style>
-          <a:lnRef idx="1">
-            <a:schemeClr val="accent1"/>
-          </a:lnRef>
-          <a:fillRef idx="3">
-            <a:schemeClr val="accent1"/>
-          </a:fillRef>
-          <a:effectRef idx="2">
-            <a:schemeClr val="accent1"/>
-          </a:effectRef>
-          <a:fontRef idx="minor">
-            <a:schemeClr val="lt1"/>
-          </a:fontRef>
-        </p:style>
-        <p:txBody>
-          <a:bodyPr wrap="square" lIns="101600" tIns="50800" rIns="101600" bIns="50800" rtlCol="0" anchor="ctr"/>
-          <a:lstStyle/>
-          <a:p>
-            <a:pPr algn="ctr">
-              <a:defRPr sz="1400" b="1">
-                <a:solidFill>
-                  <a:srgbClr val="E8EAED"/>
-                </a:solidFill>
-              </a:defRPr>
-            </a:pPr>
-            <a:r>
-              <a:t>Цикл модели</a:t>
-            </a:r>
-          </a:p>
-          <a:p>
-            <a:pPr algn="ctr">
-              <a:spcBef>
-                <a:spcPts val="300"/>
-              </a:spcBef>
-              <a:defRPr sz="1200">
-                <a:solidFill>
-                  <a:srgbClr val="9CA3AF"/>
-                </a:solidFill>
-              </a:defRPr>
-            </a:pPr>
-            <a:r>
-              <a:t>стадии 1 → 2 → 3 → 4 · ML-инженер</a:t>
-            </a:r>
-          </a:p>
-        </p:txBody>
-      </p:sp>
-      <p:sp>
-        <p:nvSpPr>
-          <p:cNvPr id="16" name="TextBox 15"/>
-          <p:cNvSpPr txBox="1"/>
-          <p:nvPr/>
-        </p:nvSpPr>
-        <p:spPr>
-          <a:xfrm>
-            <a:off x="502920" y="6537960"/>
-            <a:ext cx="5029200" cy="201168"/>
-          </a:xfrm>
-          <a:prstGeom prst="rect">
-            <a:avLst/>
-          </a:prstGeom>
-          <a:noFill/>
-        </p:spPr>
-        <p:txBody>
-          <a:bodyPr wrap="square" anchor="t">
-            <a:spAutoFit/>
-          </a:bodyPr>
-          <a:lstStyle/>
-          <a:p>
-            <a:pPr algn="l">
-              <a:defRPr sz="800" b="0">
-                <a:solidFill>
-                  <a:srgbClr val="9CA3AF"/>
-                </a:solidFill>
-              </a:defRPr>
-            </a:pPr>
-            <a:r>
-              <a:t>Epoch8 · Architecture</a:t>
-            </a:r>
-          </a:p>
-        </p:txBody>
-      </p:sp>
-      <p:sp>
-        <p:nvSpPr>
-          <p:cNvPr id="17" name="TextBox 16"/>
-          <p:cNvSpPr txBox="1"/>
-          <p:nvPr/>
-        </p:nvSpPr>
-        <p:spPr>
-          <a:xfrm>
-            <a:off x="10972800" y="6537960"/>
-            <a:ext cx="731520" cy="201168"/>
-          </a:xfrm>
-          <a:prstGeom prst="rect">
-            <a:avLst/>
-          </a:prstGeom>
-          <a:noFill/>
-        </p:spPr>
-        <p:txBody>
-          <a:bodyPr wrap="square" anchor="t">
-            <a:spAutoFit/>
-          </a:bodyPr>
-          <a:lstStyle/>
-          <a:p>
-            <a:pPr algn="r">
-              <a:defRPr sz="800" b="0">
-                <a:solidFill>
-                  <a:srgbClr val="9CA3AF"/>
-                </a:solidFill>
-              </a:defRPr>
-            </a:pPr>
-            <a:r>
-              <a:t>09/11</a:t>
-            </a:r>
+            <a:r>
+              <a:rPr lang="ru-RU" dirty="0"/>
+              <a:t>Видео каст инструкция от сценария до пакета на сервере на локальном стенде – простой пример</a:t>
+            </a:r>
+            <a:br>
+              <a:rPr lang="ru-RU" dirty="0"/>
+            </a:br>
+            <a:br>
+              <a:rPr lang="ru-RU" dirty="0"/>
+            </a:br>
+            <a:br>
+              <a:rPr lang="ru-RU" dirty="0"/>
+            </a:br>
+            <a:r>
+              <a:rPr lang="ru-RU" dirty="0"/>
+              <a:t>Сценарий</a:t>
+            </a:r>
+            <a:r>
+              <a:rPr lang="en-US" dirty="0"/>
+              <a:t>: </a:t>
+            </a:r>
+            <a:br>
+              <a:rPr lang="en-US" dirty="0"/>
+            </a:br>
+            <a:r>
+              <a:rPr lang="ru-RU" dirty="0"/>
+              <a:t>Создаем проект в гит</a:t>
+            </a:r>
+            <a:br>
+              <a:rPr lang="ru-RU" dirty="0"/>
+            </a:br>
+            <a:r>
+              <a:rPr lang="ru-RU" dirty="0"/>
+              <a:t>Создаем проект и привязываем его  к проекту в </a:t>
+            </a:r>
+            <a:r>
+              <a:rPr lang="ru-RU" dirty="0" err="1"/>
+              <a:t>админке</a:t>
+            </a:r>
+            <a:br>
+              <a:rPr lang="ru-RU" dirty="0"/>
+            </a:br>
+            <a:r>
+              <a:rPr lang="ru-RU" dirty="0"/>
+              <a:t>Разворачиваем локальные хранилища </a:t>
+            </a:r>
+            <a:r>
+              <a:rPr lang="en-US" dirty="0"/>
+              <a:t>Postgres </a:t>
+            </a:r>
+            <a:r>
+              <a:rPr lang="ru-RU" dirty="0"/>
+              <a:t>и </a:t>
+            </a:r>
+            <a:r>
+              <a:rPr lang="en-US" dirty="0"/>
+              <a:t>Mino, </a:t>
+            </a:r>
+            <a:r>
+              <a:rPr lang="ru-RU" dirty="0"/>
+              <a:t>привязываем их к проекту </a:t>
+            </a:r>
+            <a:br>
+              <a:rPr lang="ru-RU" dirty="0"/>
+            </a:br>
+            <a:r>
+              <a:rPr lang="ru-RU" dirty="0"/>
+              <a:t>Делаем форму проекта</a:t>
+            </a:r>
+            <a:br>
+              <a:rPr lang="ru-RU" dirty="0"/>
+            </a:br>
+            <a:r>
+              <a:rPr lang="ru-RU" dirty="0"/>
+              <a:t>Выдаем доступ к проекту</a:t>
+            </a:r>
+            <a:br>
+              <a:rPr lang="ru-RU" dirty="0"/>
+            </a:br>
+            <a:r>
+              <a:rPr lang="ru-RU" dirty="0"/>
+              <a:t>Смотрим его в мобилке</a:t>
+            </a:r>
+            <a:br>
+              <a:rPr lang="ru-RU" dirty="0"/>
+            </a:br>
+            <a:r>
+              <a:rPr lang="ru-RU" dirty="0"/>
+              <a:t>Заполняем форму и отправляем пакет </a:t>
+            </a:r>
+            <a:br>
+              <a:rPr lang="ru-RU" dirty="0"/>
+            </a:br>
+            <a:r>
+              <a:rPr lang="ru-RU" dirty="0"/>
+              <a:t>Смотрим пакет в </a:t>
+            </a:r>
+            <a:r>
+              <a:rPr lang="ru-RU" dirty="0" err="1"/>
+              <a:t>админке</a:t>
+            </a:r>
+            <a:br>
+              <a:rPr lang="ru-RU" dirty="0"/>
+            </a:br>
+            <a:r>
+              <a:rPr lang="ru-RU" dirty="0"/>
+              <a:t>Привязываем визуализацию </a:t>
+            </a:r>
+            <a:br>
+              <a:rPr lang="ru-RU" dirty="0"/>
+            </a:br>
+            <a:r>
+              <a:rPr lang="ru-RU" dirty="0"/>
+              <a:t>Делаем имитацию </a:t>
+            </a:r>
+            <a:r>
+              <a:rPr lang="ru-RU" dirty="0" err="1"/>
+              <a:t>инференса</a:t>
+            </a:r>
+            <a:r>
+              <a:rPr lang="ru-RU" dirty="0"/>
+              <a:t> (пишем в БД)</a:t>
+            </a:r>
+            <a:br>
+              <a:rPr lang="ru-RU" dirty="0"/>
+            </a:br>
+            <a:r>
+              <a:rPr lang="ru-RU" dirty="0"/>
+              <a:t>Смотрим результат в </a:t>
+            </a:r>
+            <a:r>
+              <a:rPr lang="ru-RU" dirty="0" err="1"/>
+              <a:t>админке</a:t>
+            </a:r>
+            <a:br>
+              <a:rPr lang="ru-RU" dirty="0"/>
+            </a:br>
+            <a:br>
+              <a:rPr lang="ru-RU" dirty="0"/>
+            </a:br>
+            <a:br>
+              <a:rPr lang="en-US" dirty="0"/>
+            </a:br>
+            <a:endParaRPr lang="ru-RU" dirty="0"/>
           </a:p>
         </p:txBody>
       </p:sp>
     </p:spTree>
+    <p:extLst>
+      <p:ext uri="{BB962C8B-B14F-4D97-AF65-F5344CB8AC3E}">
+        <p14:creationId xmlns:p14="http://schemas.microsoft.com/office/powerpoint/2010/main" val="1771538010"/>
+      </p:ext>
+    </p:extLst>
   </p:cSld>
   <p:clrMapOvr>
     <a:masterClrMapping/>
